--- a/docs/tapxora-lims-investor-pitch.pptx
+++ b/docs/tapxora-lims-investor-pitch.pptx
@@ -4,9 +4,6 @@
   <p:sldMasterIdLst>
     <p:sldMasterId id="2147483648" r:id="rId1"/>
   </p:sldMasterIdLst>
-  <p:notesMasterIdLst>
-    <p:notesMasterId r:id="rId19"/>
-  </p:notesMasterIdLst>
   <p:sldIdLst>
     <p:sldId id="256" r:id="rId2"/>
     <p:sldId id="257" r:id="rId3"/>
@@ -26,6 +23,9 @@
     <p:sldId id="271" r:id="rId17"/>
     <p:sldId id="272" r:id="rId18"/>
   </p:sldIdLst>
+  <p:notesMasterIdLst>
+    <p:notesMasterId r:id="rId19"/>
+  </p:notesMasterIdLst>
   <p:sldSz cx="12192000" cy="6858000"/>
   <p:notesSz cx="6858000" cy="12192000"/>
   <p:defaultTextStyle>
@@ -120,11 +120,6 @@
       </a:defRPr>
     </a:lvl9pPr>
   </p:defaultTextStyle>
-  <p:extLst>
-    <p:ext uri="{EFAFB233-063F-42B5-8137-9DF3F51BA10A}">
-      <p15:sldGuideLst xmlns:p15="http://schemas.microsoft.com/office/powerpoint/2012/main"/>
-    </p:ext>
-  </p:extLst>
 </p:presentation>
 </file>
 
@@ -150,10 +145,234 @@
           <a:chExt cx="0" cy="0"/>
         </a:xfrm>
       </p:grpSpPr>
+      <p:sp>
+        <p:nvSpPr>
+          <p:cNvPr id="2" name="Header Placeholder 1"/>
+          <p:cNvSpPr>
+            <a:spLocks noGrp="1"/>
+          </p:cNvSpPr>
+          <p:nvPr>
+            <p:ph type="hdr" sz="quarter"/>
+          </p:nvPr>
+        </p:nvSpPr>
+        <p:spPr>
+          <a:xfrm>
+            <a:off x="0" y="0"/>
+            <a:ext cx="2971800" cy="458788"/>
+          </a:xfrm>
+          <a:prstGeom prst="rect">
+            <a:avLst/>
+          </a:prstGeom>
+        </p:spPr>
+        <p:txBody>
+          <a:bodyPr vert="horz" lIns="91440" tIns="45720" rIns="91440" bIns="45720" rtlCol="0"/>
+          <a:lstStyle>
+            <a:lvl1pPr algn="l">
+              <a:defRPr sz="1200"/>
+            </a:lvl1pPr>
+          </a:lstStyle>
+          <a:p>
+            <a:endParaRPr lang="en-US"/>
+          </a:p>
+        </p:txBody>
+      </p:sp>
+      <p:sp>
+        <p:nvSpPr>
+          <p:cNvPr id="3" name="Date Placeholder 2"/>
+          <p:cNvSpPr>
+            <a:spLocks noGrp="1"/>
+          </p:cNvSpPr>
+          <p:nvPr>
+            <p:ph type="dt" idx="1"/>
+          </p:nvPr>
+        </p:nvSpPr>
+        <p:spPr>
+          <a:xfrm>
+            <a:off x="3884613" y="0"/>
+            <a:ext cx="2971800" cy="458788"/>
+          </a:xfrm>
+          <a:prstGeom prst="rect">
+            <a:avLst/>
+          </a:prstGeom>
+        </p:spPr>
+        <p:txBody>
+          <a:bodyPr vert="horz" lIns="91440" tIns="45720" rIns="91440" bIns="45720" rtlCol="0"/>
+          <a:lstStyle>
+            <a:lvl1pPr algn="r">
+              <a:defRPr sz="1200"/>
+            </a:lvl1pPr>
+          </a:lstStyle>
+          <a:p>
+            <a:fld id="{5282F153-3F37-0F45-9E97-73ACFA13230C}" type="datetimeFigureOut">
+              <a:rPr lang="en-US"/>
+              <a:t>7/23/19</a:t>
+            </a:fld>
+            <a:endParaRPr lang="en-US"/>
+          </a:p>
+        </p:txBody>
+      </p:sp>
+      <p:sp>
+        <p:nvSpPr>
+          <p:cNvPr id="4" name="Slide Image Placeholder 3"/>
+          <p:cNvSpPr>
+            <a:spLocks noGrp="1" noRot="1" noChangeAspect="1"/>
+          </p:cNvSpPr>
+          <p:nvPr>
+            <p:ph type="sldImg" idx="2"/>
+          </p:nvPr>
+        </p:nvSpPr>
+        <p:spPr>
+          <a:xfrm>
+            <a:off x="685800" y="1143000"/>
+            <a:ext cx="5486400" cy="3086100"/>
+          </a:xfrm>
+          <a:prstGeom prst="rect">
+            <a:avLst/>
+          </a:prstGeom>
+          <a:noFill/>
+          <a:ln w="12700">
+            <a:solidFill>
+              <a:prstClr val="black"/>
+            </a:solidFill>
+          </a:ln>
+        </p:spPr>
+        <p:txBody>
+          <a:bodyPr vert="horz" lIns="91440" tIns="45720" rIns="91440" bIns="45720" rtlCol="0" anchor="ctr"/>
+          <a:lstStyle/>
+          <a:p>
+            <a:endParaRPr lang="en-US"/>
+          </a:p>
+        </p:txBody>
+      </p:sp>
+      <p:sp>
+        <p:nvSpPr>
+          <p:cNvPr id="5" name="Notes Placeholder 4"/>
+          <p:cNvSpPr>
+            <a:spLocks noGrp="1"/>
+          </p:cNvSpPr>
+          <p:nvPr>
+            <p:ph type="body" sz="quarter" idx="3"/>
+          </p:nvPr>
+        </p:nvSpPr>
+        <p:spPr>
+          <a:xfrm>
+            <a:off x="685800" y="4400550"/>
+            <a:ext cx="5486400" cy="3600450"/>
+          </a:xfrm>
+          <a:prstGeom prst="rect">
+            <a:avLst/>
+          </a:prstGeom>
+        </p:spPr>
+        <p:txBody>
+          <a:bodyPr vert="horz" lIns="91440" tIns="45720" rIns="91440" bIns="45720" rtlCol="0"/>
+          <a:lstStyle/>
+          <a:p>
+            <a:pPr lvl="0"/>
+            <a:r>
+              <a:rPr lang="en-US"/>
+              <a:t>Click to edit Master text styles</a:t>
+            </a:r>
+          </a:p>
+          <a:p>
+            <a:pPr lvl="1"/>
+            <a:r>
+              <a:rPr lang="en-US"/>
+              <a:t>Second level</a:t>
+            </a:r>
+          </a:p>
+          <a:p>
+            <a:pPr lvl="2"/>
+            <a:r>
+              <a:rPr lang="en-US"/>
+              <a:t>Third level</a:t>
+            </a:r>
+          </a:p>
+          <a:p>
+            <a:pPr lvl="3"/>
+            <a:r>
+              <a:rPr lang="en-US"/>
+              <a:t>Fourth level</a:t>
+            </a:r>
+          </a:p>
+          <a:p>
+            <a:pPr lvl="4"/>
+            <a:r>
+              <a:rPr lang="en-US"/>
+              <a:t>Fifth level</a:t>
+            </a:r>
+          </a:p>
+        </p:txBody>
+      </p:sp>
+      <p:sp>
+        <p:nvSpPr>
+          <p:cNvPr id="6" name="Footer Placeholder 5"/>
+          <p:cNvSpPr>
+            <a:spLocks noGrp="1"/>
+          </p:cNvSpPr>
+          <p:nvPr>
+            <p:ph type="ftr" sz="quarter" idx="4"/>
+          </p:nvPr>
+        </p:nvSpPr>
+        <p:spPr>
+          <a:xfrm>
+            <a:off x="0" y="8685213"/>
+            <a:ext cx="2971800" cy="458787"/>
+          </a:xfrm>
+          <a:prstGeom prst="rect">
+            <a:avLst/>
+          </a:prstGeom>
+        </p:spPr>
+        <p:txBody>
+          <a:bodyPr vert="horz" lIns="91440" tIns="45720" rIns="91440" bIns="45720" rtlCol="0" anchor="b"/>
+          <a:lstStyle>
+            <a:lvl1pPr algn="l">
+              <a:defRPr sz="1200"/>
+            </a:lvl1pPr>
+          </a:lstStyle>
+          <a:p>
+            <a:endParaRPr lang="en-US"/>
+          </a:p>
+        </p:txBody>
+      </p:sp>
+      <p:sp>
+        <p:nvSpPr>
+          <p:cNvPr id="7" name="Slide Number Placeholder 6"/>
+          <p:cNvSpPr>
+            <a:spLocks noGrp="1"/>
+          </p:cNvSpPr>
+          <p:nvPr>
+            <p:ph type="sldNum" sz="quarter" idx="5"/>
+          </p:nvPr>
+        </p:nvSpPr>
+        <p:spPr>
+          <a:xfrm>
+            <a:off x="3884613" y="8685213"/>
+            <a:ext cx="2971800" cy="458787"/>
+          </a:xfrm>
+          <a:prstGeom prst="rect">
+            <a:avLst/>
+          </a:prstGeom>
+        </p:spPr>
+        <p:txBody>
+          <a:bodyPr vert="horz" lIns="91440" tIns="45720" rIns="91440" bIns="45720" rtlCol="0" anchor="b"/>
+          <a:lstStyle>
+            <a:lvl1pPr algn="r">
+              <a:defRPr sz="1200"/>
+            </a:lvl1pPr>
+          </a:lstStyle>
+          <a:p>
+            <a:fld id="{CE5E9CC1-C706-0F49-92D6-E571CC5EEA8F}" type="slidenum">
+              <a:rPr lang="en-US"/>
+              <a:t>‹#›</a:t>
+            </a:fld>
+            <a:endParaRPr lang="en-US"/>
+          </a:p>
+        </p:txBody>
+      </p:sp>
     </p:spTree>
     <p:extLst>
       <p:ext uri="{BB962C8B-B14F-4D97-AF65-F5344CB8AC3E}">
-        <p14:creationId xmlns:p14="http://schemas.microsoft.com/office/powerpoint/2010/main" val="4233387540"/>
+        <p14:creationId xmlns:p14="http://schemas.microsoft.com/office/powerpoint/2010/main" val="1024086991"/>
       </p:ext>
     </p:extLst>
   </p:cSld>
@@ -297,6 +516,10 @@
           <a:bodyPr/>
           <a:lstStyle/>
           <a:p>
+            <a:r>
+              <a:rPr lang="en-US" dirty="0"/>
+              <a:t/>
+            </a:r>
             <a:endParaRPr lang="en-US" dirty="0"/>
           </a:p>
         </p:txBody>
@@ -381,6 +604,10 @@
           <a:bodyPr/>
           <a:lstStyle/>
           <a:p>
+            <a:r>
+              <a:rPr lang="en-US" dirty="0"/>
+              <a:t/>
+            </a:r>
             <a:endParaRPr lang="en-US" dirty="0"/>
           </a:p>
         </p:txBody>
@@ -465,6 +692,10 @@
           <a:bodyPr/>
           <a:lstStyle/>
           <a:p>
+            <a:r>
+              <a:rPr lang="en-US" dirty="0"/>
+              <a:t/>
+            </a:r>
             <a:endParaRPr lang="en-US" dirty="0"/>
           </a:p>
         </p:txBody>
@@ -549,6 +780,10 @@
           <a:bodyPr/>
           <a:lstStyle/>
           <a:p>
+            <a:r>
+              <a:rPr lang="en-US" dirty="0"/>
+              <a:t/>
+            </a:r>
             <a:endParaRPr lang="en-US" dirty="0"/>
           </a:p>
         </p:txBody>
@@ -633,6 +868,10 @@
           <a:bodyPr/>
           <a:lstStyle/>
           <a:p>
+            <a:r>
+              <a:rPr lang="en-US" dirty="0"/>
+              <a:t/>
+            </a:r>
             <a:endParaRPr lang="en-US" dirty="0"/>
           </a:p>
         </p:txBody>
@@ -717,6 +956,10 @@
           <a:bodyPr/>
           <a:lstStyle/>
           <a:p>
+            <a:r>
+              <a:rPr lang="en-US" dirty="0"/>
+              <a:t/>
+            </a:r>
             <a:endParaRPr lang="en-US" dirty="0"/>
           </a:p>
         </p:txBody>
@@ -801,6 +1044,10 @@
           <a:bodyPr/>
           <a:lstStyle/>
           <a:p>
+            <a:r>
+              <a:rPr lang="en-US" dirty="0"/>
+              <a:t/>
+            </a:r>
             <a:endParaRPr lang="en-US" dirty="0"/>
           </a:p>
         </p:txBody>
@@ -885,6 +1132,10 @@
           <a:bodyPr/>
           <a:lstStyle/>
           <a:p>
+            <a:r>
+              <a:rPr lang="en-US" dirty="0"/>
+              <a:t/>
+            </a:r>
             <a:endParaRPr lang="en-US" dirty="0"/>
           </a:p>
         </p:txBody>
@@ -969,6 +1220,10 @@
           <a:bodyPr/>
           <a:lstStyle/>
           <a:p>
+            <a:r>
+              <a:rPr lang="en-US" dirty="0"/>
+              <a:t/>
+            </a:r>
             <a:endParaRPr lang="en-US" dirty="0"/>
           </a:p>
         </p:txBody>
@@ -1053,6 +1308,10 @@
           <a:bodyPr/>
           <a:lstStyle/>
           <a:p>
+            <a:r>
+              <a:rPr lang="en-US" dirty="0"/>
+              <a:t/>
+            </a:r>
             <a:endParaRPr lang="en-US" dirty="0"/>
           </a:p>
         </p:txBody>
@@ -1137,6 +1396,10 @@
           <a:bodyPr/>
           <a:lstStyle/>
           <a:p>
+            <a:r>
+              <a:rPr lang="en-US" dirty="0"/>
+              <a:t/>
+            </a:r>
             <a:endParaRPr lang="en-US" dirty="0"/>
           </a:p>
         </p:txBody>
@@ -1221,6 +1484,10 @@
           <a:bodyPr/>
           <a:lstStyle/>
           <a:p>
+            <a:r>
+              <a:rPr lang="en-US" dirty="0"/>
+              <a:t/>
+            </a:r>
             <a:endParaRPr lang="en-US" dirty="0"/>
           </a:p>
         </p:txBody>
@@ -1305,6 +1572,10 @@
           <a:bodyPr/>
           <a:lstStyle/>
           <a:p>
+            <a:r>
+              <a:rPr lang="en-US" dirty="0"/>
+              <a:t/>
+            </a:r>
             <a:endParaRPr lang="en-US" dirty="0"/>
           </a:p>
         </p:txBody>
@@ -1389,6 +1660,10 @@
           <a:bodyPr/>
           <a:lstStyle/>
           <a:p>
+            <a:r>
+              <a:rPr lang="en-US" dirty="0"/>
+              <a:t/>
+            </a:r>
             <a:endParaRPr lang="en-US" dirty="0"/>
           </a:p>
         </p:txBody>
@@ -1473,6 +1748,10 @@
           <a:bodyPr/>
           <a:lstStyle/>
           <a:p>
+            <a:r>
+              <a:rPr lang="en-US" dirty="0"/>
+              <a:t/>
+            </a:r>
             <a:endParaRPr lang="en-US" dirty="0"/>
           </a:p>
         </p:txBody>
@@ -1557,6 +1836,10 @@
           <a:bodyPr/>
           <a:lstStyle/>
           <a:p>
+            <a:r>
+              <a:rPr lang="en-US" dirty="0"/>
+              <a:t/>
+            </a:r>
             <a:endParaRPr lang="en-US" dirty="0"/>
           </a:p>
         </p:txBody>
@@ -1641,6 +1924,10 @@
           <a:bodyPr/>
           <a:lstStyle/>
           <a:p>
+            <a:r>
+              <a:rPr lang="en-US" dirty="0"/>
+              <a:t/>
+            </a:r>
             <a:endParaRPr lang="en-US" dirty="0"/>
           </a:p>
         </p:txBody>
@@ -1714,11 +2001,6 @@
 <file path=ppt/slideMasters/slideMaster1.xml><?xml version="1.0" encoding="utf-8"?>
 <p:sldMaster xmlns:a="http://schemas.openxmlformats.org/drawingml/2006/main" xmlns:r="http://schemas.openxmlformats.org/officeDocument/2006/relationships" xmlns:p="http://schemas.openxmlformats.org/presentationml/2006/main">
   <p:cSld>
-    <p:bg>
-      <p:bgRef idx="1001">
-        <a:schemeClr val="bg1"/>
-      </p:bgRef>
-    </p:bg>
     <p:spTree>
       <p:nvGrpSpPr>
         <p:cNvPr id="1" name=""/>
@@ -2001,7 +2283,6 @@
         <a:solidFill>
           <a:srgbClr val="F8FBFF"/>
         </a:solidFill>
-        <a:effectLst/>
       </p:bgPr>
     </p:bg>
     <p:spTree>
@@ -2066,7 +2347,7 @@
           </a:bodyPr>
           <a:lstStyle/>
           <a:p>
-            <a:pPr marL="0" indent="0">
+            <a:pPr indent="0" marL="0">
               <a:buNone/>
             </a:pPr>
             <a:r>
@@ -2107,7 +2388,7 @@
           </a:bodyPr>
           <a:lstStyle/>
           <a:p>
-            <a:pPr marL="0" indent="0">
+            <a:pPr indent="0" marL="0">
               <a:buNone/>
             </a:pPr>
             <a:r>
@@ -2148,7 +2429,7 @@
           </a:bodyPr>
           <a:lstStyle/>
           <a:p>
-            <a:pPr marL="0" indent="0">
+            <a:pPr indent="0" marL="0">
               <a:buNone/>
             </a:pPr>
             <a:r>
@@ -2160,7 +2441,7 @@
                 <a:ea typeface="Aptos" pitchFamily="34" charset="-122"/>
                 <a:cs typeface="Aptos" pitchFamily="34" charset="-120"/>
               </a:rPr>
-              <a:t>Offline-first Laboratory Information Management System for Nigerian diagnostic laboratories</a:t>
+              <a:t>Online Laboratory Information Management System for Nigerian diagnostic laboratories</a:t>
             </a:r>
             <a:endParaRPr lang="en-US" sz="1300" dirty="0"/>
           </a:p>
@@ -2214,7 +2495,7 @@
           </a:bodyPr>
           <a:lstStyle/>
           <a:p>
-            <a:pPr marL="0" indent="0">
+            <a:pPr indent="0" marL="0">
               <a:buNone/>
             </a:pPr>
             <a:r>
@@ -2280,7 +2561,7 @@
           </a:bodyPr>
           <a:lstStyle/>
           <a:p>
-            <a:pPr marL="0" indent="0">
+            <a:pPr indent="0" marL="0">
               <a:buNone/>
             </a:pPr>
             <a:r>
@@ -2292,7 +2573,7 @@
                 <a:ea typeface="Aptos" pitchFamily="34" charset="-122"/>
                 <a:cs typeface="Aptos" pitchFamily="34" charset="-120"/>
               </a:rPr>
-              <a:t>Built for patient registration, sample tracking, results, reporting, billing, inventory, accounting, and offline operations.</a:t>
+              <a:t>Built for patient registration, sample tracking, results, reporting, billing, inventory, accounting, and online operations.</a:t>
             </a:r>
             <a:endParaRPr lang="en-US" sz="1080" dirty="0"/>
           </a:p>
@@ -2346,7 +2627,7 @@
           </a:bodyPr>
           <a:lstStyle/>
           <a:p>
-            <a:pPr marL="0" indent="0">
+            <a:pPr indent="0" marL="0">
               <a:buNone/>
             </a:pPr>
             <a:r>
@@ -2414,7 +2695,7 @@
           </a:bodyPr>
           <a:lstStyle/>
           <a:p>
-            <a:pPr marL="0" indent="0">
+            <a:pPr indent="0" marL="0">
               <a:buNone/>
             </a:pPr>
             <a:r>
@@ -2426,7 +2707,7 @@
                 <a:ea typeface="Aptos" pitchFamily="34" charset="-122"/>
                 <a:cs typeface="Aptos" pitchFamily="34" charset="-120"/>
               </a:rPr>
-              <a:t>Offline-first LIMS</a:t>
+              <a:t>Online LIMS</a:t>
             </a:r>
             <a:endParaRPr lang="en-US" sz="2200" dirty="0"/>
           </a:p>
@@ -2455,7 +2736,7 @@
           </a:bodyPr>
           <a:lstStyle/>
           <a:p>
-            <a:pPr marL="0" indent="0">
+            <a:pPr indent="0" marL="0">
               <a:buNone/>
             </a:pPr>
             <a:r>
@@ -2523,7 +2804,7 @@
           </a:bodyPr>
           <a:lstStyle/>
           <a:p>
-            <a:pPr marL="0" indent="0" algn="ctr">
+            <a:pPr algn="ctr" indent="0" marL="0">
               <a:buNone/>
             </a:pPr>
             <a:r>
@@ -2591,7 +2872,7 @@
           </a:bodyPr>
           <a:lstStyle/>
           <a:p>
-            <a:pPr marL="0" indent="0" algn="ctr">
+            <a:pPr algn="ctr" indent="0" marL="0">
               <a:buNone/>
             </a:pPr>
             <a:r>
@@ -2659,7 +2940,7 @@
           </a:bodyPr>
           <a:lstStyle/>
           <a:p>
-            <a:pPr marL="0" indent="0" algn="ctr">
+            <a:pPr algn="ctr" indent="0" marL="0">
               <a:buNone/>
             </a:pPr>
             <a:r>
@@ -2727,7 +3008,7 @@
           </a:bodyPr>
           <a:lstStyle/>
           <a:p>
-            <a:pPr marL="0" indent="0" algn="ctr">
+            <a:pPr algn="ctr" indent="0" marL="0">
               <a:buNone/>
             </a:pPr>
             <a:r>
@@ -2768,7 +3049,7 @@
           </a:bodyPr>
           <a:lstStyle/>
           <a:p>
-            <a:pPr marL="0" indent="0">
+            <a:pPr indent="0" marL="0">
               <a:buNone/>
             </a:pPr>
             <a:r>
@@ -2802,7 +3083,6 @@
         <a:solidFill>
           <a:srgbClr val="F8FBFF"/>
         </a:solidFill>
-        <a:effectLst/>
       </p:bgPr>
     </p:bg>
     <p:spTree>
@@ -2867,7 +3147,7 @@
           </a:bodyPr>
           <a:lstStyle/>
           <a:p>
-            <a:pPr marL="0" indent="0">
+            <a:pPr indent="0" marL="0">
               <a:buNone/>
             </a:pPr>
             <a:r>
@@ -2908,7 +3188,7 @@
           </a:bodyPr>
           <a:lstStyle/>
           <a:p>
-            <a:pPr marL="0" indent="0">
+            <a:pPr indent="0" marL="0">
               <a:buNone/>
             </a:pPr>
             <a:r>
@@ -2974,7 +3254,7 @@
           </a:bodyPr>
           <a:lstStyle/>
           <a:p>
-            <a:pPr marL="0" indent="0">
+            <a:pPr indent="0" marL="0">
               <a:buNone/>
             </a:pPr>
             <a:r>
@@ -3040,7 +3320,7 @@
           </a:bodyPr>
           <a:lstStyle/>
           <a:p>
-            <a:pPr marL="0" indent="0">
+            <a:pPr indent="0" marL="0">
               <a:buNone/>
             </a:pPr>
             <a:r>
@@ -3106,7 +3386,7 @@
           </a:bodyPr>
           <a:lstStyle/>
           <a:p>
-            <a:pPr marL="0" indent="0">
+            <a:pPr indent="0" marL="0">
               <a:buNone/>
             </a:pPr>
             <a:r>
@@ -3172,7 +3452,7 @@
           </a:bodyPr>
           <a:lstStyle/>
           <a:p>
-            <a:pPr marL="0" indent="0">
+            <a:pPr indent="0" marL="0">
               <a:buNone/>
             </a:pPr>
             <a:r>
@@ -3238,7 +3518,7 @@
           </a:bodyPr>
           <a:lstStyle/>
           <a:p>
-            <a:pPr marL="0" indent="0">
+            <a:pPr indent="0" marL="0">
               <a:buNone/>
             </a:pPr>
             <a:r>
@@ -3333,7 +3613,7 @@
           </a:bodyPr>
           <a:lstStyle/>
           <a:p>
-            <a:pPr marL="0" indent="0" algn="ctr">
+            <a:pPr algn="ctr" indent="0" marL="0">
               <a:buNone/>
             </a:pPr>
             <a:r>
@@ -3401,7 +3681,7 @@
           </a:bodyPr>
           <a:lstStyle/>
           <a:p>
-            <a:pPr marL="0" indent="0" algn="ctr">
+            <a:pPr algn="ctr" indent="0" marL="0">
               <a:buNone/>
             </a:pPr>
             <a:r>
@@ -3469,7 +3749,7 @@
           </a:bodyPr>
           <a:lstStyle/>
           <a:p>
-            <a:pPr marL="0" indent="0" algn="ctr">
+            <a:pPr algn="ctr" indent="0" marL="0">
               <a:buNone/>
             </a:pPr>
             <a:r>
@@ -3537,7 +3817,7 @@
           </a:bodyPr>
           <a:lstStyle/>
           <a:p>
-            <a:pPr marL="0" indent="0" algn="ctr">
+            <a:pPr algn="ctr" indent="0" marL="0">
               <a:buNone/>
             </a:pPr>
             <a:r>
@@ -3578,7 +3858,7 @@
           </a:bodyPr>
           <a:lstStyle/>
           <a:p>
-            <a:pPr marL="0" indent="0">
+            <a:pPr indent="0" marL="0">
               <a:buNone/>
             </a:pPr>
             <a:r>
@@ -3612,7 +3892,6 @@
         <a:solidFill>
           <a:srgbClr val="F8FBFF"/>
         </a:solidFill>
-        <a:effectLst/>
       </p:bgPr>
     </p:bg>
     <p:spTree>
@@ -3677,7 +3956,7 @@
           </a:bodyPr>
           <a:lstStyle/>
           <a:p>
-            <a:pPr marL="0" indent="0">
+            <a:pPr indent="0" marL="0">
               <a:buNone/>
             </a:pPr>
             <a:r>
@@ -3718,7 +3997,7 @@
           </a:bodyPr>
           <a:lstStyle/>
           <a:p>
-            <a:pPr marL="0" indent="0">
+            <a:pPr indent="0" marL="0">
               <a:buNone/>
             </a:pPr>
             <a:r>
@@ -3784,7 +4063,7 @@
           </a:bodyPr>
           <a:lstStyle/>
           <a:p>
-            <a:pPr marL="0" indent="0">
+            <a:pPr indent="0" marL="0">
               <a:buNone/>
             </a:pPr>
             <a:r>
@@ -3796,7 +4075,7 @@
                 <a:ea typeface="Aptos" pitchFamily="34" charset="-122"/>
                 <a:cs typeface="Aptos" pitchFamily="34" charset="-120"/>
               </a:rPr>
-              <a:t>Offline-first workflow is central, not an afterthought.</a:t>
+              <a:t>Simple online workflow is central, not an afterthought.</a:t>
             </a:r>
             <a:endParaRPr lang="en-US" sz="1080" dirty="0"/>
           </a:p>
@@ -3850,7 +4129,7 @@
           </a:bodyPr>
           <a:lstStyle/>
           <a:p>
-            <a:pPr marL="0" indent="0">
+            <a:pPr indent="0" marL="0">
               <a:buNone/>
             </a:pPr>
             <a:r>
@@ -3916,7 +4195,7 @@
           </a:bodyPr>
           <a:lstStyle/>
           <a:p>
-            <a:pPr marL="0" indent="0">
+            <a:pPr indent="0" marL="0">
               <a:buNone/>
             </a:pPr>
             <a:r>
@@ -3982,7 +4261,7 @@
           </a:bodyPr>
           <a:lstStyle/>
           <a:p>
-            <a:pPr marL="0" indent="0">
+            <a:pPr indent="0" marL="0">
               <a:buNone/>
             </a:pPr>
             <a:r>
@@ -3994,7 +4273,7 @@
                 <a:ea typeface="Aptos" pitchFamily="34" charset="-122"/>
                 <a:cs typeface="Aptos" pitchFamily="34" charset="-120"/>
               </a:rPr>
-              <a:t>Role-based access helps owners separate receptionist, scientist, verifier, accountant, and admin responsibilities.</a:t>
+              <a:t>Role-based access helps owners separate receptionist, scientist, HOD/chief scientist, accountant, and admin responsibilities.</a:t>
             </a:r>
             <a:endParaRPr lang="en-US" sz="1080" dirty="0"/>
           </a:p>
@@ -4048,7 +4327,7 @@
           </a:bodyPr>
           <a:lstStyle/>
           <a:p>
-            <a:pPr marL="0" indent="0">
+            <a:pPr indent="0" marL="0">
               <a:buNone/>
             </a:pPr>
             <a:r>
@@ -4060,7 +4339,7 @@
                 <a:ea typeface="Aptos" pitchFamily="34" charset="-122"/>
                 <a:cs typeface="Aptos" pitchFamily="34" charset="-120"/>
               </a:rPr>
-              <a:t>Modern web deployment reduces installation friction while still supporting local offline continuity.</a:t>
+              <a:t>Modern web deployment reduces installation friction while keeping the system easy to maintain.</a:t>
             </a:r>
             <a:endParaRPr lang="en-US" sz="1080" dirty="0"/>
           </a:p>
@@ -4143,7 +4422,7 @@
           </a:bodyPr>
           <a:lstStyle/>
           <a:p>
-            <a:pPr marL="0" indent="0" algn="ctr">
+            <a:pPr algn="ctr" indent="0" marL="0">
               <a:buNone/>
             </a:pPr>
             <a:r>
@@ -4155,7 +4434,7 @@
                 <a:ea typeface="Aptos" pitchFamily="34" charset="-122"/>
                 <a:cs typeface="Aptos" pitchFamily="34" charset="-120"/>
               </a:rPr>
-              <a:t>Offline-first</a:t>
+              <a:t>Online-first</a:t>
             </a:r>
             <a:endParaRPr lang="en-US" sz="850" dirty="0"/>
           </a:p>
@@ -4211,7 +4490,7 @@
           </a:bodyPr>
           <a:lstStyle/>
           <a:p>
-            <a:pPr marL="0" indent="0" algn="ctr">
+            <a:pPr algn="ctr" indent="0" marL="0">
               <a:buNone/>
             </a:pPr>
             <a:r>
@@ -4279,7 +4558,7 @@
           </a:bodyPr>
           <a:lstStyle/>
           <a:p>
-            <a:pPr marL="0" indent="0" algn="ctr">
+            <a:pPr algn="ctr" indent="0" marL="0">
               <a:buNone/>
             </a:pPr>
             <a:r>
@@ -4347,7 +4626,7 @@
           </a:bodyPr>
           <a:lstStyle/>
           <a:p>
-            <a:pPr marL="0" indent="0" algn="ctr">
+            <a:pPr algn="ctr" indent="0" marL="0">
               <a:buNone/>
             </a:pPr>
             <a:r>
@@ -4388,7 +4667,7 @@
           </a:bodyPr>
           <a:lstStyle/>
           <a:p>
-            <a:pPr marL="0" indent="0">
+            <a:pPr indent="0" marL="0">
               <a:buNone/>
             </a:pPr>
             <a:r>
@@ -4422,7 +4701,6 @@
         <a:solidFill>
           <a:srgbClr val="F8FBFF"/>
         </a:solidFill>
-        <a:effectLst/>
       </p:bgPr>
     </p:bg>
     <p:spTree>
@@ -4487,7 +4765,7 @@
           </a:bodyPr>
           <a:lstStyle/>
           <a:p>
-            <a:pPr marL="0" indent="0">
+            <a:pPr indent="0" marL="0">
               <a:buNone/>
             </a:pPr>
             <a:r>
@@ -4528,7 +4806,7 @@
           </a:bodyPr>
           <a:lstStyle/>
           <a:p>
-            <a:pPr marL="0" indent="0">
+            <a:pPr indent="0" marL="0">
               <a:buNone/>
             </a:pPr>
             <a:r>
@@ -4594,7 +4872,7 @@
           </a:bodyPr>
           <a:lstStyle/>
           <a:p>
-            <a:pPr marL="0" indent="0">
+            <a:pPr indent="0" marL="0">
               <a:buNone/>
             </a:pPr>
             <a:r>
@@ -4606,7 +4884,7 @@
                 <a:ea typeface="Aptos" pitchFamily="34" charset="-122"/>
                 <a:cs typeface="Aptos" pitchFamily="34" charset="-120"/>
               </a:rPr>
-              <a:t>Current product: authentication, role management, patients, test catalogue, sample tracking, result entry, verification, reporting, billing, inventory, accounting, dashboards, audit logs, and offline sync.</a:t>
+              <a:t>Current product: authentication, role management, patients, test catalogue, sample tracking, result entry, verification, reporting, billing, inventory, accounting, dashboards, and audit logs.</a:t>
             </a:r>
             <a:endParaRPr lang="en-US" sz="1080" dirty="0"/>
           </a:p>
@@ -4660,7 +4938,7 @@
           </a:bodyPr>
           <a:lstStyle/>
           <a:p>
-            <a:pPr marL="0" indent="0">
+            <a:pPr indent="0" marL="0">
               <a:buNone/>
             </a:pPr>
             <a:r>
@@ -4726,7 +5004,7 @@
           </a:bodyPr>
           <a:lstStyle/>
           <a:p>
-            <a:pPr marL="0" indent="0">
+            <a:pPr indent="0" marL="0">
               <a:buNone/>
             </a:pPr>
             <a:r>
@@ -4792,7 +5070,7 @@
           </a:bodyPr>
           <a:lstStyle/>
           <a:p>
-            <a:pPr marL="0" indent="0">
+            <a:pPr indent="0" marL="0">
               <a:buNone/>
             </a:pPr>
             <a:r>
@@ -4858,7 +5136,7 @@
           </a:bodyPr>
           <a:lstStyle/>
           <a:p>
-            <a:pPr marL="0" indent="0">
+            <a:pPr indent="0" marL="0">
               <a:buNone/>
             </a:pPr>
             <a:r>
@@ -4953,7 +5231,7 @@
           </a:bodyPr>
           <a:lstStyle/>
           <a:p>
-            <a:pPr marL="0" indent="0" algn="ctr">
+            <a:pPr algn="ctr" indent="0" marL="0">
               <a:buNone/>
             </a:pPr>
             <a:r>
@@ -5021,7 +5299,7 @@
           </a:bodyPr>
           <a:lstStyle/>
           <a:p>
-            <a:pPr marL="0" indent="0" algn="ctr">
+            <a:pPr algn="ctr" indent="0" marL="0">
               <a:buNone/>
             </a:pPr>
             <a:r>
@@ -5089,7 +5367,7 @@
           </a:bodyPr>
           <a:lstStyle/>
           <a:p>
-            <a:pPr marL="0" indent="0" algn="ctr">
+            <a:pPr algn="ctr" indent="0" marL="0">
               <a:buNone/>
             </a:pPr>
             <a:r>
@@ -5157,7 +5435,7 @@
           </a:bodyPr>
           <a:lstStyle/>
           <a:p>
-            <a:pPr marL="0" indent="0" algn="ctr">
+            <a:pPr algn="ctr" indent="0" marL="0">
               <a:buNone/>
             </a:pPr>
             <a:r>
@@ -5198,7 +5476,7 @@
           </a:bodyPr>
           <a:lstStyle/>
           <a:p>
-            <a:pPr marL="0" indent="0">
+            <a:pPr indent="0" marL="0">
               <a:buNone/>
             </a:pPr>
             <a:r>
@@ -5232,7 +5510,6 @@
         <a:solidFill>
           <a:srgbClr val="F8FBFF"/>
         </a:solidFill>
-        <a:effectLst/>
       </p:bgPr>
     </p:bg>
     <p:spTree>
@@ -5297,7 +5574,7 @@
           </a:bodyPr>
           <a:lstStyle/>
           <a:p>
-            <a:pPr marL="0" indent="0">
+            <a:pPr indent="0" marL="0">
               <a:buNone/>
             </a:pPr>
             <a:r>
@@ -5338,7 +5615,7 @@
           </a:bodyPr>
           <a:lstStyle/>
           <a:p>
-            <a:pPr marL="0" indent="0">
+            <a:pPr indent="0" marL="0">
               <a:buNone/>
             </a:pPr>
             <a:r>
@@ -5404,7 +5681,7 @@
           </a:bodyPr>
           <a:lstStyle/>
           <a:p>
-            <a:pPr marL="0" indent="0">
+            <a:pPr indent="0" marL="0">
               <a:buNone/>
             </a:pPr>
             <a:r>
@@ -5470,7 +5747,7 @@
           </a:bodyPr>
           <a:lstStyle/>
           <a:p>
-            <a:pPr marL="0" indent="0">
+            <a:pPr indent="0" marL="0">
               <a:buNone/>
             </a:pPr>
             <a:r>
@@ -5536,7 +5813,7 @@
           </a:bodyPr>
           <a:lstStyle/>
           <a:p>
-            <a:pPr marL="0" indent="0">
+            <a:pPr indent="0" marL="0">
               <a:buNone/>
             </a:pPr>
             <a:r>
@@ -5602,7 +5879,7 @@
           </a:bodyPr>
           <a:lstStyle/>
           <a:p>
-            <a:pPr marL="0" indent="0">
+            <a:pPr indent="0" marL="0">
               <a:buNone/>
             </a:pPr>
             <a:r>
@@ -5668,7 +5945,7 @@
           </a:bodyPr>
           <a:lstStyle/>
           <a:p>
-            <a:pPr marL="0" indent="0">
+            <a:pPr indent="0" marL="0">
               <a:buNone/>
             </a:pPr>
             <a:r>
@@ -5763,7 +6040,7 @@
           </a:bodyPr>
           <a:lstStyle/>
           <a:p>
-            <a:pPr marL="0" indent="0" algn="ctr">
+            <a:pPr algn="ctr" indent="0" marL="0">
               <a:buNone/>
             </a:pPr>
             <a:r>
@@ -5831,7 +6108,7 @@
           </a:bodyPr>
           <a:lstStyle/>
           <a:p>
-            <a:pPr marL="0" indent="0" algn="ctr">
+            <a:pPr algn="ctr" indent="0" marL="0">
               <a:buNone/>
             </a:pPr>
             <a:r>
@@ -5899,7 +6176,7 @@
           </a:bodyPr>
           <a:lstStyle/>
           <a:p>
-            <a:pPr marL="0" indent="0" algn="ctr">
+            <a:pPr algn="ctr" indent="0" marL="0">
               <a:buNone/>
             </a:pPr>
             <a:r>
@@ -5967,7 +6244,7 @@
           </a:bodyPr>
           <a:lstStyle/>
           <a:p>
-            <a:pPr marL="0" indent="0" algn="ctr">
+            <a:pPr algn="ctr" indent="0" marL="0">
               <a:buNone/>
             </a:pPr>
             <a:r>
@@ -6008,7 +6285,7 @@
           </a:bodyPr>
           <a:lstStyle/>
           <a:p>
-            <a:pPr marL="0" indent="0">
+            <a:pPr indent="0" marL="0">
               <a:buNone/>
             </a:pPr>
             <a:r>
@@ -6042,7 +6319,6 @@
         <a:solidFill>
           <a:srgbClr val="F8FBFF"/>
         </a:solidFill>
-        <a:effectLst/>
       </p:bgPr>
     </p:bg>
     <p:spTree>
@@ -6107,7 +6383,7 @@
           </a:bodyPr>
           <a:lstStyle/>
           <a:p>
-            <a:pPr marL="0" indent="0">
+            <a:pPr indent="0" marL="0">
               <a:buNone/>
             </a:pPr>
             <a:r>
@@ -6148,7 +6424,7 @@
           </a:bodyPr>
           <a:lstStyle/>
           <a:p>
-            <a:pPr marL="0" indent="0">
+            <a:pPr indent="0" marL="0">
               <a:buNone/>
             </a:pPr>
             <a:r>
@@ -6214,7 +6490,7 @@
           </a:bodyPr>
           <a:lstStyle/>
           <a:p>
-            <a:pPr marL="0" indent="0">
+            <a:pPr indent="0" marL="0">
               <a:buNone/>
             </a:pPr>
             <a:r>
@@ -6226,7 +6502,7 @@
                 <a:ea typeface="Aptos" pitchFamily="34" charset="-122"/>
                 <a:cs typeface="Aptos" pitchFamily="34" charset="-120"/>
               </a:rPr>
-              <a:t>Founder / CEO: Elebe Obinna Vitalis</a:t>
+              <a:t>Founder / CEO: ______________________________</a:t>
             </a:r>
             <a:endParaRPr lang="en-US" sz="1080" dirty="0"/>
           </a:p>
@@ -6280,7 +6556,7 @@
           </a:bodyPr>
           <a:lstStyle/>
           <a:p>
-            <a:pPr marL="0" indent="0">
+            <a:pPr indent="0" marL="0">
               <a:buNone/>
             </a:pPr>
             <a:r>
@@ -6292,7 +6568,7 @@
                 <a:ea typeface="Aptos" pitchFamily="34" charset="-122"/>
                 <a:cs typeface="Aptos" pitchFamily="34" charset="-120"/>
               </a:rPr>
-              <a:t>Technical Lead:  Elebe Obinna Vitalis</a:t>
+              <a:t>Technical Lead: ______________________________</a:t>
             </a:r>
             <a:endParaRPr lang="en-US" sz="1080" dirty="0"/>
           </a:p>
@@ -6346,7 +6622,7 @@
           </a:bodyPr>
           <a:lstStyle/>
           <a:p>
-            <a:pPr marL="0" indent="0">
+            <a:pPr indent="0" marL="0">
               <a:buNone/>
             </a:pPr>
             <a:r>
@@ -6358,7 +6634,7 @@
                 <a:ea typeface="Aptos" pitchFamily="34" charset="-122"/>
                 <a:cs typeface="Aptos" pitchFamily="34" charset="-120"/>
               </a:rPr>
-              <a:t>Clinical Advisor / Laboratory Scientist: Elebe Chibuike Michael</a:t>
+              <a:t>Clinical Advisor / Laboratory Scientist: ______________________________</a:t>
             </a:r>
             <a:endParaRPr lang="en-US" sz="1080" dirty="0"/>
           </a:p>
@@ -6412,7 +6688,7 @@
           </a:bodyPr>
           <a:lstStyle/>
           <a:p>
-            <a:pPr marL="0" indent="0">
+            <a:pPr indent="0" marL="0">
               <a:buNone/>
             </a:pPr>
             <a:r>
@@ -6424,7 +6700,7 @@
                 <a:ea typeface="Aptos" pitchFamily="34" charset="-122"/>
                 <a:cs typeface="Aptos" pitchFamily="34" charset="-120"/>
               </a:rPr>
-              <a:t>Operations / Customer Success: Emmanuel Chizoba</a:t>
+              <a:t>Operations / Customer Success: ______________________________</a:t>
             </a:r>
             <a:endParaRPr lang="en-US" sz="1080" dirty="0"/>
           </a:p>
@@ -6454,6 +6730,47 @@
             <a:prstDash val="solid"/>
           </a:ln>
         </p:spPr>
+      </p:sp>
+      <p:sp>
+        <p:nvSpPr>
+          <p:cNvPr id="14" name="Text 12"/>
+          <p:cNvSpPr/>
+          <p:nvPr/>
+        </p:nvSpPr>
+        <p:spPr>
+          <a:xfrm>
+            <a:off x="749808" y="3319272"/>
+            <a:ext cx="5074920" cy="384048"/>
+          </a:xfrm>
+          <a:prstGeom prst="rect">
+            <a:avLst/>
+          </a:prstGeom>
+          <a:noFill/>
+          <a:ln/>
+        </p:spPr>
+        <p:txBody>
+          <a:bodyPr wrap="square" lIns="0" tIns="0" rIns="0" bIns="0" rtlCol="0" anchor="ctr">
+            <a:normAutofit/>
+          </a:bodyPr>
+          <a:lstStyle/>
+          <a:p>
+            <a:pPr indent="0" marL="0">
+              <a:buNone/>
+            </a:pPr>
+            <a:r>
+              <a:rPr lang="en-US" sz="1080" dirty="0">
+                <a:solidFill>
+                  <a:srgbClr val="0F172A"/>
+                </a:solidFill>
+                <a:latin typeface="Aptos" pitchFamily="34" charset="0"/>
+                <a:ea typeface="Aptos" pitchFamily="34" charset="-122"/>
+                <a:cs typeface="Aptos" pitchFamily="34" charset="-120"/>
+              </a:rPr>
+              <a:t>Finance / Partnerships: ______________________________</a:t>
+            </a:r>
+            <a:endParaRPr lang="en-US" sz="1080" dirty="0"/>
+          </a:p>
+        </p:txBody>
       </p:sp>
       <p:sp>
         <p:nvSpPr>
@@ -6505,7 +6822,7 @@
           </a:bodyPr>
           <a:lstStyle/>
           <a:p>
-            <a:pPr marL="0" indent="0">
+            <a:pPr indent="0" marL="0">
               <a:buNone/>
             </a:pPr>
             <a:r>
@@ -6600,7 +6917,7 @@
           </a:bodyPr>
           <a:lstStyle/>
           <a:p>
-            <a:pPr marL="0" indent="0" algn="ctr">
+            <a:pPr algn="ctr" indent="0" marL="0">
               <a:buNone/>
             </a:pPr>
             <a:r>
@@ -6668,7 +6985,7 @@
           </a:bodyPr>
           <a:lstStyle/>
           <a:p>
-            <a:pPr marL="0" indent="0" algn="ctr">
+            <a:pPr algn="ctr" indent="0" marL="0">
               <a:buNone/>
             </a:pPr>
             <a:r>
@@ -6736,7 +7053,7 @@
           </a:bodyPr>
           <a:lstStyle/>
           <a:p>
-            <a:pPr marL="0" indent="0" algn="ctr">
+            <a:pPr algn="ctr" indent="0" marL="0">
               <a:buNone/>
             </a:pPr>
             <a:r>
@@ -6804,7 +7121,7 @@
           </a:bodyPr>
           <a:lstStyle/>
           <a:p>
-            <a:pPr marL="0" indent="0" algn="ctr">
+            <a:pPr algn="ctr" indent="0" marL="0">
               <a:buNone/>
             </a:pPr>
             <a:r>
@@ -6845,7 +7162,7 @@
           </a:bodyPr>
           <a:lstStyle/>
           <a:p>
-            <a:pPr marL="0" indent="0">
+            <a:pPr indent="0" marL="0">
               <a:buNone/>
             </a:pPr>
             <a:r>
@@ -6879,7 +7196,6 @@
         <a:solidFill>
           <a:srgbClr val="F8FBFF"/>
         </a:solidFill>
-        <a:effectLst/>
       </p:bgPr>
     </p:bg>
     <p:spTree>
@@ -6944,7 +7260,7 @@
           </a:bodyPr>
           <a:lstStyle/>
           <a:p>
-            <a:pPr marL="0" indent="0">
+            <a:pPr indent="0" marL="0">
               <a:buNone/>
             </a:pPr>
             <a:r>
@@ -6985,7 +7301,7 @@
           </a:bodyPr>
           <a:lstStyle/>
           <a:p>
-            <a:pPr marL="0" indent="0">
+            <a:pPr indent="0" marL="0">
               <a:buNone/>
             </a:pPr>
             <a:r>
@@ -7051,7 +7367,7 @@
           </a:bodyPr>
           <a:lstStyle/>
           <a:p>
-            <a:pPr marL="0" indent="0">
+            <a:pPr indent="0" marL="0">
               <a:buNone/>
             </a:pPr>
             <a:r>
@@ -7063,7 +7379,7 @@
                 <a:ea typeface="Aptos" pitchFamily="34" charset="-122"/>
                 <a:cs typeface="Aptos" pitchFamily="34" charset="-120"/>
               </a:rPr>
-              <a:t>Year 1 revenue: NGN 6,000,000</a:t>
+              <a:t>Year 1 revenue: NGN __________</a:t>
             </a:r>
             <a:endParaRPr lang="en-US" sz="1080" dirty="0"/>
           </a:p>
@@ -7117,7 +7433,7 @@
           </a:bodyPr>
           <a:lstStyle/>
           <a:p>
-            <a:pPr marL="0" indent="0">
+            <a:pPr indent="0" marL="0">
               <a:buNone/>
             </a:pPr>
             <a:r>
@@ -7129,7 +7445,7 @@
                 <a:ea typeface="Aptos" pitchFamily="34" charset="-122"/>
                 <a:cs typeface="Aptos" pitchFamily="34" charset="-120"/>
               </a:rPr>
-              <a:t>Year 2 revenue: NGN 30,000,000</a:t>
+              <a:t>Year 2 revenue: NGN __________</a:t>
             </a:r>
             <a:endParaRPr lang="en-US" sz="1080" dirty="0"/>
           </a:p>
@@ -7183,7 +7499,7 @@
           </a:bodyPr>
           <a:lstStyle/>
           <a:p>
-            <a:pPr marL="0" indent="0">
+            <a:pPr indent="0" marL="0">
               <a:buNone/>
             </a:pPr>
             <a:r>
@@ -7195,7 +7511,7 @@
                 <a:ea typeface="Aptos" pitchFamily="34" charset="-122"/>
                 <a:cs typeface="Aptos" pitchFamily="34" charset="-120"/>
               </a:rPr>
-              <a:t>Year 3 revenue: NGN 312,000,000</a:t>
+              <a:t>Year 3 revenue: NGN __________</a:t>
             </a:r>
             <a:endParaRPr lang="en-US" sz="1080" dirty="0"/>
           </a:p>
@@ -7249,7 +7565,7 @@
           </a:bodyPr>
           <a:lstStyle/>
           <a:p>
-            <a:pPr marL="0" indent="0">
+            <a:pPr indent="0" marL="0">
               <a:buNone/>
             </a:pPr>
             <a:r>
@@ -7261,7 +7577,7 @@
                 <a:ea typeface="Aptos" pitchFamily="34" charset="-122"/>
                 <a:cs typeface="Aptos" pitchFamily="34" charset="-120"/>
               </a:rPr>
-              <a:t>Gross margin assumption: 70%</a:t>
+              <a:t>Gross margin assumption: __________%</a:t>
             </a:r>
             <a:endParaRPr lang="en-US" sz="1080" dirty="0"/>
           </a:p>
@@ -7315,7 +7631,7 @@
           </a:bodyPr>
           <a:lstStyle/>
           <a:p>
-            <a:pPr marL="0" indent="0">
+            <a:pPr indent="0" marL="0">
               <a:buNone/>
             </a:pPr>
             <a:r>
@@ -7410,7 +7726,7 @@
           </a:bodyPr>
           <a:lstStyle/>
           <a:p>
-            <a:pPr marL="0" indent="0" algn="ctr">
+            <a:pPr algn="ctr" indent="0" marL="0">
               <a:buNone/>
             </a:pPr>
             <a:r>
@@ -7478,7 +7794,7 @@
           </a:bodyPr>
           <a:lstStyle/>
           <a:p>
-            <a:pPr marL="0" indent="0" algn="ctr">
+            <a:pPr algn="ctr" indent="0" marL="0">
               <a:buNone/>
             </a:pPr>
             <a:r>
@@ -7546,7 +7862,7 @@
           </a:bodyPr>
           <a:lstStyle/>
           <a:p>
-            <a:pPr marL="0" indent="0" algn="ctr">
+            <a:pPr algn="ctr" indent="0" marL="0">
               <a:buNone/>
             </a:pPr>
             <a:r>
@@ -7614,7 +7930,7 @@
           </a:bodyPr>
           <a:lstStyle/>
           <a:p>
-            <a:pPr marL="0" indent="0" algn="ctr">
+            <a:pPr algn="ctr" indent="0" marL="0">
               <a:buNone/>
             </a:pPr>
             <a:r>
@@ -7655,7 +7971,7 @@
           </a:bodyPr>
           <a:lstStyle/>
           <a:p>
-            <a:pPr marL="0" indent="0">
+            <a:pPr indent="0" marL="0">
               <a:buNone/>
             </a:pPr>
             <a:r>
@@ -7689,7 +8005,6 @@
         <a:solidFill>
           <a:srgbClr val="F8FBFF"/>
         </a:solidFill>
-        <a:effectLst/>
       </p:bgPr>
     </p:bg>
     <p:spTree>
@@ -7754,7 +8069,7 @@
           </a:bodyPr>
           <a:lstStyle/>
           <a:p>
-            <a:pPr marL="0" indent="0">
+            <a:pPr indent="0" marL="0">
               <a:buNone/>
             </a:pPr>
             <a:r>
@@ -7795,7 +8110,7 @@
           </a:bodyPr>
           <a:lstStyle/>
           <a:p>
-            <a:pPr marL="0" indent="0">
+            <a:pPr indent="0" marL="0">
               <a:buNone/>
             </a:pPr>
             <a:r>
@@ -7861,7 +8176,7 @@
           </a:bodyPr>
           <a:lstStyle/>
           <a:p>
-            <a:pPr marL="0" indent="0">
+            <a:pPr indent="0" marL="0">
               <a:buNone/>
             </a:pPr>
             <a:r>
@@ -7927,7 +8242,7 @@
           </a:bodyPr>
           <a:lstStyle/>
           <a:p>
-            <a:pPr marL="0" indent="0">
+            <a:pPr indent="0" marL="0">
               <a:buNone/>
             </a:pPr>
             <a:r>
@@ -7993,7 +8308,7 @@
           </a:bodyPr>
           <a:lstStyle/>
           <a:p>
-            <a:pPr marL="0" indent="0">
+            <a:pPr indent="0" marL="0">
               <a:buNone/>
             </a:pPr>
             <a:r>
@@ -8059,7 +8374,7 @@
           </a:bodyPr>
           <a:lstStyle/>
           <a:p>
-            <a:pPr marL="0" indent="0">
+            <a:pPr indent="0" marL="0">
               <a:buNone/>
             </a:pPr>
             <a:r>
@@ -8127,7 +8442,7 @@
           </a:bodyPr>
           <a:lstStyle/>
           <a:p>
-            <a:pPr marL="0" indent="0">
+            <a:pPr indent="0" marL="0">
               <a:buNone/>
             </a:pPr>
             <a:r>
@@ -8222,7 +8537,7 @@
           </a:bodyPr>
           <a:lstStyle/>
           <a:p>
-            <a:pPr marL="0" indent="0" algn="ctr">
+            <a:pPr algn="ctr" indent="0" marL="0">
               <a:buNone/>
             </a:pPr>
             <a:r>
@@ -8290,7 +8605,7 @@
           </a:bodyPr>
           <a:lstStyle/>
           <a:p>
-            <a:pPr marL="0" indent="0" algn="ctr">
+            <a:pPr algn="ctr" indent="0" marL="0">
               <a:buNone/>
             </a:pPr>
             <a:r>
@@ -8358,7 +8673,7 @@
           </a:bodyPr>
           <a:lstStyle/>
           <a:p>
-            <a:pPr marL="0" indent="0" algn="ctr">
+            <a:pPr algn="ctr" indent="0" marL="0">
               <a:buNone/>
             </a:pPr>
             <a:r>
@@ -8426,7 +8741,7 @@
           </a:bodyPr>
           <a:lstStyle/>
           <a:p>
-            <a:pPr marL="0" indent="0" algn="ctr">
+            <a:pPr algn="ctr" indent="0" marL="0">
               <a:buNone/>
             </a:pPr>
             <a:r>
@@ -8467,7 +8782,7 @@
           </a:bodyPr>
           <a:lstStyle/>
           <a:p>
-            <a:pPr marL="0" indent="0">
+            <a:pPr indent="0" marL="0">
               <a:buNone/>
             </a:pPr>
             <a:r>
@@ -8501,7 +8816,6 @@
         <a:solidFill>
           <a:srgbClr val="F8FBFF"/>
         </a:solidFill>
-        <a:effectLst/>
       </p:bgPr>
     </p:bg>
     <p:spTree>
@@ -8566,7 +8880,7 @@
           </a:bodyPr>
           <a:lstStyle/>
           <a:p>
-            <a:pPr marL="0" indent="0">
+            <a:pPr indent="0" marL="0">
               <a:buNone/>
             </a:pPr>
             <a:r>
@@ -8607,7 +8921,7 @@
           </a:bodyPr>
           <a:lstStyle/>
           <a:p>
-            <a:pPr marL="0" indent="0">
+            <a:pPr indent="0" marL="0">
               <a:buNone/>
             </a:pPr>
             <a:r>
@@ -8673,7 +8987,7 @@
           </a:bodyPr>
           <a:lstStyle/>
           <a:p>
-            <a:pPr marL="0" indent="0">
+            <a:pPr indent="0" marL="0">
               <a:buNone/>
             </a:pPr>
             <a:r>
@@ -8739,7 +9053,7 @@
           </a:bodyPr>
           <a:lstStyle/>
           <a:p>
-            <a:pPr marL="0" indent="0">
+            <a:pPr indent="0" marL="0">
               <a:buNone/>
             </a:pPr>
             <a:r>
@@ -8805,7 +9119,7 @@
           </a:bodyPr>
           <a:lstStyle/>
           <a:p>
-            <a:pPr marL="0" indent="0">
+            <a:pPr indent="0" marL="0">
               <a:buNone/>
             </a:pPr>
             <a:r>
@@ -8871,7 +9185,7 @@
           </a:bodyPr>
           <a:lstStyle/>
           <a:p>
-            <a:pPr marL="0" indent="0">
+            <a:pPr indent="0" marL="0">
               <a:buNone/>
             </a:pPr>
             <a:r>
@@ -8937,7 +9251,7 @@
           </a:bodyPr>
           <a:lstStyle/>
           <a:p>
-            <a:pPr marL="0" indent="0">
+            <a:pPr indent="0" marL="0">
               <a:buNone/>
             </a:pPr>
             <a:r>
@@ -9032,7 +9346,7 @@
           </a:bodyPr>
           <a:lstStyle/>
           <a:p>
-            <a:pPr marL="0" indent="0" algn="ctr">
+            <a:pPr algn="ctr" indent="0" marL="0">
               <a:buNone/>
             </a:pPr>
             <a:r>
@@ -9100,7 +9414,7 @@
           </a:bodyPr>
           <a:lstStyle/>
           <a:p>
-            <a:pPr marL="0" indent="0" algn="ctr">
+            <a:pPr algn="ctr" indent="0" marL="0">
               <a:buNone/>
             </a:pPr>
             <a:r>
@@ -9168,7 +9482,7 @@
           </a:bodyPr>
           <a:lstStyle/>
           <a:p>
-            <a:pPr marL="0" indent="0" algn="ctr">
+            <a:pPr algn="ctr" indent="0" marL="0">
               <a:buNone/>
             </a:pPr>
             <a:r>
@@ -9236,7 +9550,7 @@
           </a:bodyPr>
           <a:lstStyle/>
           <a:p>
-            <a:pPr marL="0" indent="0" algn="ctr">
+            <a:pPr algn="ctr" indent="0" marL="0">
               <a:buNone/>
             </a:pPr>
             <a:r>
@@ -9277,7 +9591,7 @@
           </a:bodyPr>
           <a:lstStyle/>
           <a:p>
-            <a:pPr marL="0" indent="0">
+            <a:pPr indent="0" marL="0">
               <a:buNone/>
             </a:pPr>
             <a:r>
@@ -9311,7 +9625,6 @@
         <a:solidFill>
           <a:srgbClr val="F8FBFF"/>
         </a:solidFill>
-        <a:effectLst/>
       </p:bgPr>
     </p:bg>
     <p:spTree>
@@ -9376,7 +9689,7 @@
           </a:bodyPr>
           <a:lstStyle/>
           <a:p>
-            <a:pPr marL="0" indent="0">
+            <a:pPr indent="0" marL="0">
               <a:buNone/>
             </a:pPr>
             <a:r>
@@ -9417,7 +9730,7 @@
           </a:bodyPr>
           <a:lstStyle/>
           <a:p>
-            <a:pPr marL="0" indent="0">
+            <a:pPr indent="0" marL="0">
               <a:buNone/>
             </a:pPr>
             <a:r>
@@ -9483,7 +9796,7 @@
           </a:bodyPr>
           <a:lstStyle/>
           <a:p>
-            <a:pPr marL="0" indent="0">
+            <a:pPr indent="0" marL="0">
               <a:buNone/>
             </a:pPr>
             <a:r>
@@ -9495,7 +9808,7 @@
                 <a:ea typeface="Aptos" pitchFamily="34" charset="-122"/>
                 <a:cs typeface="Aptos" pitchFamily="34" charset="-120"/>
               </a:rPr>
-              <a:t>Tapxora LIMS is a web-based, offline-first operating system for small and mid-sized laboratories.</a:t>
+              <a:t>Tapxora LIMS is a web-based operating system for small and mid-sized laboratories.</a:t>
             </a:r>
             <a:endParaRPr lang="en-US" sz="1080" dirty="0"/>
           </a:p>
@@ -9549,7 +9862,7 @@
           </a:bodyPr>
           <a:lstStyle/>
           <a:p>
-            <a:pPr marL="0" indent="0">
+            <a:pPr indent="0" marL="0">
               <a:buNone/>
             </a:pPr>
             <a:r>
@@ -9561,7 +9874,7 @@
                 <a:ea typeface="Aptos" pitchFamily="34" charset="-122"/>
                 <a:cs typeface="Aptos" pitchFamily="34" charset="-120"/>
               </a:rPr>
-              <a:t>The app is designed around Nigerian field realities: unstable internet, paper-heavy workflows, fragmented billing, and limited operational reporting.</a:t>
+              <a:t>The app is designed around Nigerian field realities: paper-heavy workflows, fragmented billing, weak traceability, and limited operational reporting.</a:t>
             </a:r>
             <a:endParaRPr lang="en-US" sz="1080" dirty="0"/>
           </a:p>
@@ -9615,7 +9928,7 @@
           </a:bodyPr>
           <a:lstStyle/>
           <a:p>
-            <a:pPr marL="0" indent="0">
+            <a:pPr indent="0" marL="0">
               <a:buNone/>
             </a:pPr>
             <a:r>
@@ -9681,7 +9994,7 @@
           </a:bodyPr>
           <a:lstStyle/>
           <a:p>
-            <a:pPr marL="0" indent="0">
+            <a:pPr indent="0" marL="0">
               <a:buNone/>
             </a:pPr>
             <a:r>
@@ -9749,7 +10062,7 @@
           </a:bodyPr>
           <a:lstStyle/>
           <a:p>
-            <a:pPr marL="0" indent="0">
+            <a:pPr indent="0" marL="0">
               <a:buNone/>
             </a:pPr>
             <a:r>
@@ -9844,7 +10157,7 @@
           </a:bodyPr>
           <a:lstStyle/>
           <a:p>
-            <a:pPr marL="0" indent="0" algn="ctr">
+            <a:pPr algn="ctr" indent="0" marL="0">
               <a:buNone/>
             </a:pPr>
             <a:r>
@@ -9912,7 +10225,7 @@
           </a:bodyPr>
           <a:lstStyle/>
           <a:p>
-            <a:pPr marL="0" indent="0" algn="ctr">
+            <a:pPr algn="ctr" indent="0" marL="0">
               <a:buNone/>
             </a:pPr>
             <a:r>
@@ -9980,7 +10293,7 @@
           </a:bodyPr>
           <a:lstStyle/>
           <a:p>
-            <a:pPr marL="0" indent="0" algn="ctr">
+            <a:pPr algn="ctr" indent="0" marL="0">
               <a:buNone/>
             </a:pPr>
             <a:r>
@@ -10048,7 +10361,7 @@
           </a:bodyPr>
           <a:lstStyle/>
           <a:p>
-            <a:pPr marL="0" indent="0" algn="ctr">
+            <a:pPr algn="ctr" indent="0" marL="0">
               <a:buNone/>
             </a:pPr>
             <a:r>
@@ -10089,7 +10402,7 @@
           </a:bodyPr>
           <a:lstStyle/>
           <a:p>
-            <a:pPr marL="0" indent="0">
+            <a:pPr indent="0" marL="0">
               <a:buNone/>
             </a:pPr>
             <a:r>
@@ -10123,7 +10436,6 @@
         <a:solidFill>
           <a:srgbClr val="F8FBFF"/>
         </a:solidFill>
-        <a:effectLst/>
       </p:bgPr>
     </p:bg>
     <p:spTree>
@@ -10188,7 +10500,7 @@
           </a:bodyPr>
           <a:lstStyle/>
           <a:p>
-            <a:pPr marL="0" indent="0">
+            <a:pPr indent="0" marL="0">
               <a:buNone/>
             </a:pPr>
             <a:r>
@@ -10229,7 +10541,7 @@
           </a:bodyPr>
           <a:lstStyle/>
           <a:p>
-            <a:pPr marL="0" indent="0">
+            <a:pPr indent="0" marL="0">
               <a:buNone/>
             </a:pPr>
             <a:r>
@@ -10295,7 +10607,7 @@
           </a:bodyPr>
           <a:lstStyle/>
           <a:p>
-            <a:pPr marL="0" indent="0">
+            <a:pPr indent="0" marL="0">
               <a:buNone/>
             </a:pPr>
             <a:r>
@@ -10307,7 +10619,7 @@
                 <a:ea typeface="Aptos" pitchFamily="34" charset="-122"/>
                 <a:cs typeface="Aptos" pitchFamily="34" charset="-120"/>
               </a:rPr>
-              <a:t>Internet instability can interrupt patient registration, result entry, reporting, billing, and end-of-day reconciliation.</a:t>
+              <a:t>Manual and disconnected workflows interrupt patient registration, result entry, reporting, billing, and end-of-day reconciliation.</a:t>
             </a:r>
             <a:endParaRPr lang="en-US" sz="1080" dirty="0"/>
           </a:p>
@@ -10361,7 +10673,7 @@
           </a:bodyPr>
           <a:lstStyle/>
           <a:p>
-            <a:pPr marL="0" indent="0">
+            <a:pPr indent="0" marL="0">
               <a:buNone/>
             </a:pPr>
             <a:r>
@@ -10427,7 +10739,7 @@
           </a:bodyPr>
           <a:lstStyle/>
           <a:p>
-            <a:pPr marL="0" indent="0">
+            <a:pPr indent="0" marL="0">
               <a:buNone/>
             </a:pPr>
             <a:r>
@@ -10493,7 +10805,7 @@
           </a:bodyPr>
           <a:lstStyle/>
           <a:p>
-            <a:pPr marL="0" indent="0">
+            <a:pPr indent="0" marL="0">
               <a:buNone/>
             </a:pPr>
             <a:r>
@@ -10559,7 +10871,7 @@
           </a:bodyPr>
           <a:lstStyle/>
           <a:p>
-            <a:pPr marL="0" indent="0">
+            <a:pPr indent="0" marL="0">
               <a:buNone/>
             </a:pPr>
             <a:r>
@@ -10654,7 +10966,7 @@
           </a:bodyPr>
           <a:lstStyle/>
           <a:p>
-            <a:pPr marL="0" indent="0" algn="ctr">
+            <a:pPr algn="ctr" indent="0" marL="0">
               <a:buNone/>
             </a:pPr>
             <a:r>
@@ -10722,7 +11034,7 @@
           </a:bodyPr>
           <a:lstStyle/>
           <a:p>
-            <a:pPr marL="0" indent="0" algn="ctr">
+            <a:pPr algn="ctr" indent="0" marL="0">
               <a:buNone/>
             </a:pPr>
             <a:r>
@@ -10790,7 +11102,7 @@
           </a:bodyPr>
           <a:lstStyle/>
           <a:p>
-            <a:pPr marL="0" indent="0" algn="ctr">
+            <a:pPr algn="ctr" indent="0" marL="0">
               <a:buNone/>
             </a:pPr>
             <a:r>
@@ -10858,7 +11170,7 @@
           </a:bodyPr>
           <a:lstStyle/>
           <a:p>
-            <a:pPr marL="0" indent="0" algn="ctr">
+            <a:pPr algn="ctr" indent="0" marL="0">
               <a:buNone/>
             </a:pPr>
             <a:r>
@@ -10899,7 +11211,7 @@
           </a:bodyPr>
           <a:lstStyle/>
           <a:p>
-            <a:pPr marL="0" indent="0">
+            <a:pPr indent="0" marL="0">
               <a:buNone/>
             </a:pPr>
             <a:r>
@@ -10933,7 +11245,6 @@
         <a:solidFill>
           <a:srgbClr val="F8FBFF"/>
         </a:solidFill>
-        <a:effectLst/>
       </p:bgPr>
     </p:bg>
     <p:spTree>
@@ -10998,7 +11309,7 @@
           </a:bodyPr>
           <a:lstStyle/>
           <a:p>
-            <a:pPr marL="0" indent="0">
+            <a:pPr indent="0" marL="0">
               <a:buNone/>
             </a:pPr>
             <a:r>
@@ -11039,7 +11350,7 @@
           </a:bodyPr>
           <a:lstStyle/>
           <a:p>
-            <a:pPr marL="0" indent="0">
+            <a:pPr indent="0" marL="0">
               <a:buNone/>
             </a:pPr>
             <a:r>
@@ -11105,7 +11416,7 @@
           </a:bodyPr>
           <a:lstStyle/>
           <a:p>
-            <a:pPr marL="0" indent="0">
+            <a:pPr indent="0" marL="0">
               <a:buNone/>
             </a:pPr>
             <a:r>
@@ -11117,7 +11428,7 @@
                 <a:ea typeface="Aptos" pitchFamily="34" charset="-122"/>
                 <a:cs typeface="Aptos" pitchFamily="34" charset="-120"/>
               </a:rPr>
-              <a:t>A secure, browser-based LIMS built with Next.js, Supabase, IndexedDB offline storage, and role-based workflows.</a:t>
+              <a:t>A secure, browser-based LIMS built with Next.js, Supabase, and role-based workflows.</a:t>
             </a:r>
             <a:endParaRPr lang="en-US" sz="1080" dirty="0"/>
           </a:p>
@@ -11171,7 +11482,7 @@
           </a:bodyPr>
           <a:lstStyle/>
           <a:p>
-            <a:pPr marL="0" indent="0">
+            <a:pPr indent="0" marL="0">
               <a:buNone/>
             </a:pPr>
             <a:r>
@@ -11237,7 +11548,7 @@
           </a:bodyPr>
           <a:lstStyle/>
           <a:p>
-            <a:pPr marL="0" indent="0">
+            <a:pPr indent="0" marL="0">
               <a:buNone/>
             </a:pPr>
             <a:r>
@@ -11249,7 +11560,7 @@
                 <a:ea typeface="Aptos" pitchFamily="34" charset="-122"/>
                 <a:cs typeface="Aptos" pitchFamily="34" charset="-120"/>
               </a:rPr>
-              <a:t>Offline-first design lets staff keep working even when internet drops, then sync changes when the connection returns.</a:t>
+              <a:t>Direct online updates keep staff working from one central database without sync conflicts.</a:t>
             </a:r>
             <a:endParaRPr lang="en-US" sz="1080" dirty="0"/>
           </a:p>
@@ -11303,7 +11614,7 @@
           </a:bodyPr>
           <a:lstStyle/>
           <a:p>
-            <a:pPr marL="0" indent="0">
+            <a:pPr indent="0" marL="0">
               <a:buNone/>
             </a:pPr>
             <a:r>
@@ -11369,7 +11680,7 @@
           </a:bodyPr>
           <a:lstStyle/>
           <a:p>
-            <a:pPr marL="0" indent="0">
+            <a:pPr indent="0" marL="0">
               <a:buNone/>
             </a:pPr>
             <a:r>
@@ -11381,7 +11692,7 @@
                 <a:ea typeface="Aptos" pitchFamily="34" charset="-122"/>
                 <a:cs typeface="Aptos" pitchFamily="34" charset="-120"/>
               </a:rPr>
-              <a:t>Role-based access supports Admin, Receptionist, Lab Scientist, Verifier, and Accountant workflows.</a:t>
+              <a:t>Role-based access supports Admin, Receptionist, Lab Scientist, HOD of Lab / Chief Scientist, and Accountant workflows.</a:t>
             </a:r>
             <a:endParaRPr lang="en-US" sz="1080" dirty="0"/>
           </a:p>
@@ -11464,7 +11775,7 @@
           </a:bodyPr>
           <a:lstStyle/>
           <a:p>
-            <a:pPr marL="0" indent="0" algn="ctr">
+            <a:pPr algn="ctr" indent="0" marL="0">
               <a:buNone/>
             </a:pPr>
             <a:r>
@@ -11532,7 +11843,7 @@
           </a:bodyPr>
           <a:lstStyle/>
           <a:p>
-            <a:pPr marL="0" indent="0" algn="ctr">
+            <a:pPr algn="ctr" indent="0" marL="0">
               <a:buNone/>
             </a:pPr>
             <a:r>
@@ -11600,7 +11911,7 @@
           </a:bodyPr>
           <a:lstStyle/>
           <a:p>
-            <a:pPr marL="0" indent="0" algn="ctr">
+            <a:pPr algn="ctr" indent="0" marL="0">
               <a:buNone/>
             </a:pPr>
             <a:r>
@@ -11668,7 +11979,7 @@
           </a:bodyPr>
           <a:lstStyle/>
           <a:p>
-            <a:pPr marL="0" indent="0" algn="ctr">
+            <a:pPr algn="ctr" indent="0" marL="0">
               <a:buNone/>
             </a:pPr>
             <a:r>
@@ -11709,7 +12020,7 @@
           </a:bodyPr>
           <a:lstStyle/>
           <a:p>
-            <a:pPr marL="0" indent="0">
+            <a:pPr indent="0" marL="0">
               <a:buNone/>
             </a:pPr>
             <a:r>
@@ -11743,7 +12054,6 @@
         <a:solidFill>
           <a:srgbClr val="F8FBFF"/>
         </a:solidFill>
-        <a:effectLst/>
       </p:bgPr>
     </p:bg>
     <p:spTree>
@@ -11808,7 +12118,7 @@
           </a:bodyPr>
           <a:lstStyle/>
           <a:p>
-            <a:pPr marL="0" indent="0">
+            <a:pPr indent="0" marL="0">
               <a:buNone/>
             </a:pPr>
             <a:r>
@@ -11849,7 +12159,7 @@
           </a:bodyPr>
           <a:lstStyle/>
           <a:p>
-            <a:pPr marL="0" indent="0">
+            <a:pPr indent="0" marL="0">
               <a:buNone/>
             </a:pPr>
             <a:r>
@@ -11915,7 +12225,7 @@
           </a:bodyPr>
           <a:lstStyle/>
           <a:p>
-            <a:pPr marL="0" indent="0">
+            <a:pPr indent="0" marL="0">
               <a:buNone/>
             </a:pPr>
             <a:r>
@@ -11981,7 +12291,7 @@
           </a:bodyPr>
           <a:lstStyle/>
           <a:p>
-            <a:pPr marL="0" indent="0">
+            <a:pPr indent="0" marL="0">
               <a:buNone/>
             </a:pPr>
             <a:r>
@@ -12047,7 +12357,7 @@
           </a:bodyPr>
           <a:lstStyle/>
           <a:p>
-            <a:pPr marL="0" indent="0">
+            <a:pPr indent="0" marL="0">
               <a:buNone/>
             </a:pPr>
             <a:r>
@@ -12113,7 +12423,7 @@
           </a:bodyPr>
           <a:lstStyle/>
           <a:p>
-            <a:pPr marL="0" indent="0">
+            <a:pPr indent="0" marL="0">
               <a:buNone/>
             </a:pPr>
             <a:r>
@@ -12179,7 +12489,7 @@
           </a:bodyPr>
           <a:lstStyle/>
           <a:p>
-            <a:pPr marL="0" indent="0">
+            <a:pPr indent="0" marL="0">
               <a:buNone/>
             </a:pPr>
             <a:r>
@@ -12191,7 +12501,7 @@
                 <a:ea typeface="Aptos" pitchFamily="34" charset="-122"/>
                 <a:cs typeface="Aptos" pitchFamily="34" charset="-120"/>
               </a:rPr>
-              <a:t>Verification and reporting are separated so technicians enter results and verifiers approve them.</a:t>
+              <a:t>Verification and reporting are separated so technicians enter results and the HOD of Lab / Chief Scientist approves them.</a:t>
             </a:r>
             <a:endParaRPr lang="en-US" sz="1080" dirty="0"/>
           </a:p>
@@ -12299,7 +12609,7 @@
           </a:bodyPr>
           <a:lstStyle/>
           <a:p>
-            <a:pPr marL="0" indent="0">
+            <a:pPr indent="0" marL="0">
               <a:buNone/>
             </a:pPr>
             <a:r>
@@ -12340,7 +12650,7 @@
           </a:bodyPr>
           <a:lstStyle/>
           <a:p>
-            <a:pPr marL="0" indent="0">
+            <a:pPr indent="0" marL="0">
               <a:buNone/>
             </a:pPr>
             <a:r>
@@ -12381,7 +12691,7 @@
           </a:bodyPr>
           <a:lstStyle/>
           <a:p>
-            <a:pPr marL="0" indent="0">
+            <a:pPr indent="0" marL="0">
               <a:buNone/>
             </a:pPr>
             <a:r>
@@ -12422,7 +12732,7 @@
           </a:bodyPr>
           <a:lstStyle/>
           <a:p>
-            <a:pPr marL="0" indent="0">
+            <a:pPr indent="0" marL="0">
               <a:buNone/>
             </a:pPr>
             <a:r>
@@ -12515,7 +12825,7 @@
           </a:bodyPr>
           <a:lstStyle/>
           <a:p>
-            <a:pPr marL="0" indent="0">
+            <a:pPr indent="0" marL="0">
               <a:buNone/>
             </a:pPr>
             <a:r>
@@ -12556,7 +12866,7 @@
           </a:bodyPr>
           <a:lstStyle/>
           <a:p>
-            <a:pPr marL="0" indent="0">
+            <a:pPr indent="0" marL="0">
               <a:buNone/>
             </a:pPr>
             <a:r>
@@ -12597,7 +12907,7 @@
           </a:bodyPr>
           <a:lstStyle/>
           <a:p>
-            <a:pPr marL="0" indent="0">
+            <a:pPr indent="0" marL="0">
               <a:buNone/>
             </a:pPr>
             <a:r>
@@ -12638,7 +12948,7 @@
           </a:bodyPr>
           <a:lstStyle/>
           <a:p>
-            <a:pPr marL="0" indent="0">
+            <a:pPr indent="0" marL="0">
               <a:buNone/>
             </a:pPr>
             <a:r>
@@ -12731,7 +13041,7 @@
           </a:bodyPr>
           <a:lstStyle/>
           <a:p>
-            <a:pPr marL="0" indent="0">
+            <a:pPr indent="0" marL="0">
               <a:buNone/>
             </a:pPr>
             <a:r>
@@ -12772,7 +13082,7 @@
           </a:bodyPr>
           <a:lstStyle/>
           <a:p>
-            <a:pPr marL="0" indent="0">
+            <a:pPr indent="0" marL="0">
               <a:buNone/>
             </a:pPr>
             <a:r>
@@ -12813,7 +13123,7 @@
           </a:bodyPr>
           <a:lstStyle/>
           <a:p>
-            <a:pPr marL="0" indent="0">
+            <a:pPr indent="0" marL="0">
               <a:buNone/>
             </a:pPr>
             <a:r>
@@ -12854,7 +13164,7 @@
           </a:bodyPr>
           <a:lstStyle/>
           <a:p>
-            <a:pPr marL="0" indent="0">
+            <a:pPr indent="0" marL="0">
               <a:buNone/>
             </a:pPr>
             <a:r>
@@ -12895,7 +13205,7 @@
           </a:bodyPr>
           <a:lstStyle/>
           <a:p>
-            <a:pPr marL="0" indent="0">
+            <a:pPr indent="0" marL="0">
               <a:buNone/>
             </a:pPr>
             <a:r>
@@ -12929,7 +13239,6 @@
         <a:solidFill>
           <a:srgbClr val="F8FBFF"/>
         </a:solidFill>
-        <a:effectLst/>
       </p:bgPr>
     </p:bg>
     <p:spTree>
@@ -12994,7 +13303,7 @@
           </a:bodyPr>
           <a:lstStyle/>
           <a:p>
-            <a:pPr marL="0" indent="0">
+            <a:pPr indent="0" marL="0">
               <a:buNone/>
             </a:pPr>
             <a:r>
@@ -13035,7 +13344,7 @@
           </a:bodyPr>
           <a:lstStyle/>
           <a:p>
-            <a:pPr marL="0" indent="0">
+            <a:pPr indent="0" marL="0">
               <a:buNone/>
             </a:pPr>
             <a:r>
@@ -13101,7 +13410,7 @@
           </a:bodyPr>
           <a:lstStyle/>
           <a:p>
-            <a:pPr marL="0" indent="0">
+            <a:pPr indent="0" marL="0">
               <a:buNone/>
             </a:pPr>
             <a:r>
@@ -13167,7 +13476,7 @@
           </a:bodyPr>
           <a:lstStyle/>
           <a:p>
-            <a:pPr marL="0" indent="0">
+            <a:pPr indent="0" marL="0">
               <a:buNone/>
             </a:pPr>
             <a:r>
@@ -13233,7 +13542,7 @@
           </a:bodyPr>
           <a:lstStyle/>
           <a:p>
-            <a:pPr marL="0" indent="0">
+            <a:pPr indent="0" marL="0">
               <a:buNone/>
             </a:pPr>
             <a:r>
@@ -13299,7 +13608,7 @@
           </a:bodyPr>
           <a:lstStyle/>
           <a:p>
-            <a:pPr marL="0" indent="0">
+            <a:pPr indent="0" marL="0">
               <a:buNone/>
             </a:pPr>
             <a:r>
@@ -13365,7 +13674,7 @@
           </a:bodyPr>
           <a:lstStyle/>
           <a:p>
-            <a:pPr marL="0" indent="0">
+            <a:pPr indent="0" marL="0">
               <a:buNone/>
             </a:pPr>
             <a:r>
@@ -13460,7 +13769,7 @@
           </a:bodyPr>
           <a:lstStyle/>
           <a:p>
-            <a:pPr marL="0" indent="0" algn="ctr">
+            <a:pPr algn="ctr" indent="0" marL="0">
               <a:buNone/>
             </a:pPr>
             <a:r>
@@ -13528,7 +13837,7 @@
           </a:bodyPr>
           <a:lstStyle/>
           <a:p>
-            <a:pPr marL="0" indent="0" algn="ctr">
+            <a:pPr algn="ctr" indent="0" marL="0">
               <a:buNone/>
             </a:pPr>
             <a:r>
@@ -13596,7 +13905,7 @@
           </a:bodyPr>
           <a:lstStyle/>
           <a:p>
-            <a:pPr marL="0" indent="0" algn="ctr">
+            <a:pPr algn="ctr" indent="0" marL="0">
               <a:buNone/>
             </a:pPr>
             <a:r>
@@ -13664,7 +13973,7 @@
           </a:bodyPr>
           <a:lstStyle/>
           <a:p>
-            <a:pPr marL="0" indent="0" algn="ctr">
+            <a:pPr algn="ctr" indent="0" marL="0">
               <a:buNone/>
             </a:pPr>
             <a:r>
@@ -13732,7 +14041,7 @@
           </a:bodyPr>
           <a:lstStyle/>
           <a:p>
-            <a:pPr marL="0" indent="0" algn="ctr">
+            <a:pPr algn="ctr" indent="0" marL="0">
               <a:buNone/>
             </a:pPr>
             <a:r>
@@ -13800,7 +14109,7 @@
           </a:bodyPr>
           <a:lstStyle/>
           <a:p>
-            <a:pPr marL="0" indent="0" algn="ctr">
+            <a:pPr algn="ctr" indent="0" marL="0">
               <a:buNone/>
             </a:pPr>
             <a:r>
@@ -13841,7 +14150,7 @@
           </a:bodyPr>
           <a:lstStyle/>
           <a:p>
-            <a:pPr marL="0" indent="0" algn="ctr">
+            <a:pPr algn="ctr" indent="0" marL="0">
               <a:buNone/>
             </a:pPr>
             <a:r>
@@ -13882,7 +14191,7 @@
           </a:bodyPr>
           <a:lstStyle/>
           <a:p>
-            <a:pPr marL="0" indent="0">
+            <a:pPr indent="0" marL="0">
               <a:buNone/>
             </a:pPr>
             <a:r>
@@ -13916,7 +14225,6 @@
         <a:solidFill>
           <a:srgbClr val="F8FBFF"/>
         </a:solidFill>
-        <a:effectLst/>
       </p:bgPr>
     </p:bg>
     <p:spTree>
@@ -13981,7 +14289,7 @@
           </a:bodyPr>
           <a:lstStyle/>
           <a:p>
-            <a:pPr marL="0" indent="0">
+            <a:pPr indent="0" marL="0">
               <a:buNone/>
             </a:pPr>
             <a:r>
@@ -13993,7 +14301,7 @@
                 <a:ea typeface="Aptos" pitchFamily="34" charset="-122"/>
                 <a:cs typeface="Aptos" pitchFamily="34" charset="-120"/>
               </a:rPr>
-              <a:t>WHY THIS MATTERS IN NIGERIA</a:t>
+              <a:t>WHY THIS MATTERS FOR LAB RELIABILITY</a:t>
             </a:r>
             <a:endParaRPr lang="en-US" sz="850" dirty="0"/>
           </a:p>
@@ -14022,11 +14330,11 @@
           </a:bodyPr>
           <a:lstStyle/>
           <a:p>
-            <a:pPr marL="0" indent="0">
-              <a:buNone/>
-            </a:pPr>
-            <a:r>
-              <a:rPr lang="en-US" sz="2500" b="1" dirty="0">
+            <a:pPr indent="0" marL="0">
+              <a:buNone/>
+            </a:pPr>
+            <a:r>
+              <a:rPr lang="en-US" sz="3100" b="1" dirty="0">
                 <a:solidFill>
                   <a:srgbClr val="0F172A"/>
                 </a:solidFill>
@@ -14034,9 +14342,9 @@
                 <a:ea typeface="Aptos" pitchFamily="34" charset="-122"/>
                 <a:cs typeface="Aptos" pitchFamily="34" charset="-120"/>
               </a:rPr>
-              <a:t>Offline-First Advantage</a:t>
-            </a:r>
-            <a:endParaRPr lang="en-US" sz="2500" dirty="0"/>
+              <a:t>Online-First Advantage</a:t>
+            </a:r>
+            <a:endParaRPr lang="en-US" sz="3100" dirty="0"/>
           </a:p>
         </p:txBody>
       </p:sp>
@@ -14088,7 +14396,7 @@
           </a:bodyPr>
           <a:lstStyle/>
           <a:p>
-            <a:pPr marL="0" indent="0">
+            <a:pPr indent="0" marL="0">
               <a:buNone/>
             </a:pPr>
             <a:r>
@@ -14100,7 +14408,7 @@
                 <a:ea typeface="Aptos" pitchFamily="34" charset="-122"/>
                 <a:cs typeface="Aptos" pitchFamily="34" charset="-120"/>
               </a:rPr>
-              <a:t>Labs can continue core operations during poor connectivity instead of stopping registration, sample capture, result entry, or billing.</a:t>
+              <a:t>Every authorized staff member sees the same central Supabase data without local sync conflicts.</a:t>
             </a:r>
             <a:endParaRPr lang="en-US" sz="1080" dirty="0"/>
           </a:p>
@@ -14154,7 +14462,7 @@
           </a:bodyPr>
           <a:lstStyle/>
           <a:p>
-            <a:pPr marL="0" indent="0">
+            <a:pPr indent="0" marL="0">
               <a:buNone/>
             </a:pPr>
             <a:r>
@@ -14166,7 +14474,7 @@
                 <a:ea typeface="Aptos" pitchFamily="34" charset="-122"/>
                 <a:cs typeface="Aptos" pitchFamily="34" charset="-120"/>
               </a:rPr>
-              <a:t>IndexedDB local storage mirrors core Supabase tables so the app remains usable in the browser.</a:t>
+              <a:t>Direct database writes make patient registration, sample movement, billing, and reports reflect quickly across modules.</a:t>
             </a:r>
             <a:endParaRPr lang="en-US" sz="1080" dirty="0"/>
           </a:p>
@@ -14220,7 +14528,7 @@
           </a:bodyPr>
           <a:lstStyle/>
           <a:p>
-            <a:pPr marL="0" indent="0">
+            <a:pPr indent="0" marL="0">
               <a:buNone/>
             </a:pPr>
             <a:r>
@@ -14232,7 +14540,7 @@
                 <a:ea typeface="Aptos" pitchFamily="34" charset="-122"/>
                 <a:cs typeface="Aptos" pitchFamily="34" charset="-120"/>
               </a:rPr>
-              <a:t>Queued mutations sync in the background when the connection returns.</a:t>
+              <a:t>Server-side RLS and RPC functions keep sensitive clinical and financial operations controlled.</a:t>
             </a:r>
             <a:endParaRPr lang="en-US" sz="1080" dirty="0"/>
           </a:p>
@@ -14286,7 +14594,7 @@
           </a:bodyPr>
           <a:lstStyle/>
           <a:p>
-            <a:pPr marL="0" indent="0">
+            <a:pPr indent="0" marL="0">
               <a:buNone/>
             </a:pPr>
             <a:r>
@@ -14298,7 +14606,7 @@
                 <a:ea typeface="Aptos" pitchFamily="34" charset="-122"/>
                 <a:cs typeface="Aptos" pitchFamily="34" charset="-120"/>
               </a:rPr>
-              <a:t>Conflict review tools let admins inspect, edit, retry, dismiss, or keep the remote copy when remote data has changed.</a:t>
+              <a:t>Netlify deployment reduces installation friction and keeps updates easy to roll out.</a:t>
             </a:r>
             <a:endParaRPr lang="en-US" sz="1080" dirty="0"/>
           </a:p>
@@ -14352,7 +14660,7 @@
           </a:bodyPr>
           <a:lstStyle/>
           <a:p>
-            <a:pPr marL="0" indent="0">
+            <a:pPr indent="0" marL="0">
               <a:buNone/>
             </a:pPr>
             <a:r>
@@ -14364,7 +14672,7 @@
                 <a:ea typeface="Aptos" pitchFamily="34" charset="-122"/>
                 <a:cs typeface="Aptos" pitchFamily="34" charset="-120"/>
               </a:rPr>
-              <a:t>This is a practical reliability advantage for regions where power and internet quality vary by location and time.</a:t>
+              <a:t>This architecture prioritizes speed, predictable behavior, and simpler public hosting.</a:t>
             </a:r>
             <a:endParaRPr lang="en-US" sz="1080" dirty="0"/>
           </a:p>
@@ -14447,7 +14755,7 @@
           </a:bodyPr>
           <a:lstStyle/>
           <a:p>
-            <a:pPr marL="0" indent="0" algn="ctr">
+            <a:pPr algn="ctr" indent="0" marL="0">
               <a:buNone/>
             </a:pPr>
             <a:r>
@@ -14459,7 +14767,7 @@
                 <a:ea typeface="Aptos" pitchFamily="34" charset="-122"/>
                 <a:cs typeface="Aptos" pitchFamily="34" charset="-120"/>
               </a:rPr>
-              <a:t>IndexedDB cache</a:t>
+              <a:t>Central database</a:t>
             </a:r>
             <a:endParaRPr lang="en-US" sz="850" dirty="0"/>
           </a:p>
@@ -14515,7 +14823,7 @@
           </a:bodyPr>
           <a:lstStyle/>
           <a:p>
-            <a:pPr marL="0" indent="0" algn="ctr">
+            <a:pPr algn="ctr" indent="0" marL="0">
               <a:buNone/>
             </a:pPr>
             <a:r>
@@ -14527,7 +14835,7 @@
                 <a:ea typeface="Aptos" pitchFamily="34" charset="-122"/>
                 <a:cs typeface="Aptos" pitchFamily="34" charset="-120"/>
               </a:rPr>
-              <a:t>Mutation queue</a:t>
+              <a:t>Direct updates</a:t>
             </a:r>
             <a:endParaRPr lang="en-US" sz="850" dirty="0"/>
           </a:p>
@@ -14583,7 +14891,7 @@
           </a:bodyPr>
           <a:lstStyle/>
           <a:p>
-            <a:pPr marL="0" indent="0" algn="ctr">
+            <a:pPr algn="ctr" indent="0" marL="0">
               <a:buNone/>
             </a:pPr>
             <a:r>
@@ -14595,7 +14903,7 @@
                 <a:ea typeface="Aptos" pitchFamily="34" charset="-122"/>
                 <a:cs typeface="Aptos" pitchFamily="34" charset="-120"/>
               </a:rPr>
-              <a:t>Background sync</a:t>
+              <a:t>RLS security</a:t>
             </a:r>
             <a:endParaRPr lang="en-US" sz="850" dirty="0"/>
           </a:p>
@@ -14651,7 +14959,7 @@
           </a:bodyPr>
           <a:lstStyle/>
           <a:p>
-            <a:pPr marL="0" indent="0" algn="ctr">
+            <a:pPr algn="ctr" indent="0" marL="0">
               <a:buNone/>
             </a:pPr>
             <a:r>
@@ -14663,7 +14971,7 @@
                 <a:ea typeface="Aptos" pitchFamily="34" charset="-122"/>
                 <a:cs typeface="Aptos" pitchFamily="34" charset="-120"/>
               </a:rPr>
-              <a:t>Conflict review</a:t>
+              <a:t>Netlify hosting</a:t>
             </a:r>
             <a:endParaRPr lang="en-US" sz="850" dirty="0"/>
           </a:p>
@@ -14692,7 +15000,7 @@
           </a:bodyPr>
           <a:lstStyle/>
           <a:p>
-            <a:pPr marL="0" indent="0">
+            <a:pPr indent="0" marL="0">
               <a:buNone/>
             </a:pPr>
             <a:r>
@@ -14726,7 +15034,6 @@
         <a:solidFill>
           <a:srgbClr val="F8FBFF"/>
         </a:solidFill>
-        <a:effectLst/>
       </p:bgPr>
     </p:bg>
     <p:spTree>
@@ -14791,7 +15098,7 @@
           </a:bodyPr>
           <a:lstStyle/>
           <a:p>
-            <a:pPr marL="0" indent="0">
+            <a:pPr indent="0" marL="0">
               <a:buNone/>
             </a:pPr>
             <a:r>
@@ -14832,7 +15139,7 @@
           </a:bodyPr>
           <a:lstStyle/>
           <a:p>
-            <a:pPr marL="0" indent="0">
+            <a:pPr indent="0" marL="0">
               <a:buNone/>
             </a:pPr>
             <a:r>
@@ -14898,7 +15205,7 @@
           </a:bodyPr>
           <a:lstStyle/>
           <a:p>
-            <a:pPr marL="0" indent="0">
+            <a:pPr indent="0" marL="0">
               <a:buNone/>
             </a:pPr>
             <a:r>
@@ -14964,7 +15271,7 @@
           </a:bodyPr>
           <a:lstStyle/>
           <a:p>
-            <a:pPr marL="0" indent="0">
+            <a:pPr indent="0" marL="0">
               <a:buNone/>
             </a:pPr>
             <a:r>
@@ -15030,7 +15337,7 @@
           </a:bodyPr>
           <a:lstStyle/>
           <a:p>
-            <a:pPr marL="0" indent="0">
+            <a:pPr indent="0" marL="0">
               <a:buNone/>
             </a:pPr>
             <a:r>
@@ -15096,7 +15403,7 @@
           </a:bodyPr>
           <a:lstStyle/>
           <a:p>
-            <a:pPr marL="0" indent="0">
+            <a:pPr indent="0" marL="0">
               <a:buNone/>
             </a:pPr>
             <a:r>
@@ -15162,7 +15469,7 @@
           </a:bodyPr>
           <a:lstStyle/>
           <a:p>
-            <a:pPr marL="0" indent="0">
+            <a:pPr indent="0" marL="0">
               <a:buNone/>
             </a:pPr>
             <a:r>
@@ -15257,7 +15564,7 @@
           </a:bodyPr>
           <a:lstStyle/>
           <a:p>
-            <a:pPr marL="0" indent="0" algn="ctr">
+            <a:pPr algn="ctr" indent="0" marL="0">
               <a:buNone/>
             </a:pPr>
             <a:r>
@@ -15325,7 +15632,7 @@
           </a:bodyPr>
           <a:lstStyle/>
           <a:p>
-            <a:pPr marL="0" indent="0" algn="ctr">
+            <a:pPr algn="ctr" indent="0" marL="0">
               <a:buNone/>
             </a:pPr>
             <a:r>
@@ -15393,7 +15700,7 @@
           </a:bodyPr>
           <a:lstStyle/>
           <a:p>
-            <a:pPr marL="0" indent="0" algn="ctr">
+            <a:pPr algn="ctr" indent="0" marL="0">
               <a:buNone/>
             </a:pPr>
             <a:r>
@@ -15461,7 +15768,7 @@
           </a:bodyPr>
           <a:lstStyle/>
           <a:p>
-            <a:pPr marL="0" indent="0" algn="ctr">
+            <a:pPr algn="ctr" indent="0" marL="0">
               <a:buNone/>
             </a:pPr>
             <a:r>
@@ -15502,7 +15809,7 @@
           </a:bodyPr>
           <a:lstStyle/>
           <a:p>
-            <a:pPr marL="0" indent="0">
+            <a:pPr indent="0" marL="0">
               <a:buNone/>
             </a:pPr>
             <a:r>
@@ -15536,7 +15843,6 @@
         <a:solidFill>
           <a:srgbClr val="F8FBFF"/>
         </a:solidFill>
-        <a:effectLst/>
       </p:bgPr>
     </p:bg>
     <p:spTree>
@@ -15601,7 +15907,7 @@
           </a:bodyPr>
           <a:lstStyle/>
           <a:p>
-            <a:pPr marL="0" indent="0">
+            <a:pPr indent="0" marL="0">
               <a:buNone/>
             </a:pPr>
             <a:r>
@@ -15642,7 +15948,7 @@
           </a:bodyPr>
           <a:lstStyle/>
           <a:p>
-            <a:pPr marL="0" indent="0">
+            <a:pPr indent="0" marL="0">
               <a:buNone/>
             </a:pPr>
             <a:r>
@@ -15708,7 +16014,7 @@
           </a:bodyPr>
           <a:lstStyle/>
           <a:p>
-            <a:pPr marL="0" indent="0">
+            <a:pPr indent="0" marL="0">
               <a:buNone/>
             </a:pPr>
             <a:r>
@@ -15774,7 +16080,7 @@
           </a:bodyPr>
           <a:lstStyle/>
           <a:p>
-            <a:pPr marL="0" indent="0">
+            <a:pPr indent="0" marL="0">
               <a:buNone/>
             </a:pPr>
             <a:r>
@@ -15840,7 +16146,7 @@
           </a:bodyPr>
           <a:lstStyle/>
           <a:p>
-            <a:pPr marL="0" indent="0">
+            <a:pPr indent="0" marL="0">
               <a:buNone/>
             </a:pPr>
             <a:r>
@@ -15906,7 +16212,7 @@
           </a:bodyPr>
           <a:lstStyle/>
           <a:p>
-            <a:pPr marL="0" indent="0">
+            <a:pPr indent="0" marL="0">
               <a:buNone/>
             </a:pPr>
             <a:r>
@@ -15918,7 +16224,7 @@
                 <a:ea typeface="Aptos" pitchFamily="34" charset="-122"/>
                 <a:cs typeface="Aptos" pitchFamily="34" charset="-120"/>
               </a:rPr>
-              <a:t>Market size : number of target labs in Nigeria: 1080 (30 labs per state)</a:t>
+              <a:t>Market size to insert: number of target labs in Nigeria: __________.</a:t>
             </a:r>
             <a:endParaRPr lang="en-US" sz="1080" dirty="0"/>
           </a:p>
@@ -15972,7 +16278,7 @@
           </a:bodyPr>
           <a:lstStyle/>
           <a:p>
-            <a:pPr marL="0" indent="0">
+            <a:pPr indent="0" marL="0">
               <a:buNone/>
             </a:pPr>
             <a:r>
@@ -15984,7 +16290,7 @@
                 <a:ea typeface="Aptos" pitchFamily="34" charset="-122"/>
                 <a:cs typeface="Aptos" pitchFamily="34" charset="-120"/>
               </a:rPr>
-              <a:t>Pricing benchmark: current monthly spend on software, paper, admin labor, and lost billing leakage: N250,000 ($180).</a:t>
+              <a:t>Pricing benchmark to insert: current monthly spend on software, paper, admin labor, and lost billing leakage: __________.</a:t>
             </a:r>
             <a:endParaRPr lang="en-US" sz="1080" dirty="0"/>
           </a:p>
@@ -16040,7 +16346,7 @@
           </a:bodyPr>
           <a:lstStyle/>
           <a:p>
-            <a:pPr marL="0" indent="0">
+            <a:pPr indent="0" marL="0">
               <a:buNone/>
             </a:pPr>
             <a:r>
@@ -16135,7 +16441,7 @@
           </a:bodyPr>
           <a:lstStyle/>
           <a:p>
-            <a:pPr marL="0" indent="0" algn="ctr">
+            <a:pPr algn="ctr" indent="0" marL="0">
               <a:buNone/>
             </a:pPr>
             <a:r>
@@ -16203,7 +16509,7 @@
           </a:bodyPr>
           <a:lstStyle/>
           <a:p>
-            <a:pPr marL="0" indent="0" algn="ctr">
+            <a:pPr algn="ctr" indent="0" marL="0">
               <a:buNone/>
             </a:pPr>
             <a:r>
@@ -16271,7 +16577,7 @@
           </a:bodyPr>
           <a:lstStyle/>
           <a:p>
-            <a:pPr marL="0" indent="0" algn="ctr">
+            <a:pPr algn="ctr" indent="0" marL="0">
               <a:buNone/>
             </a:pPr>
             <a:r>
@@ -16339,7 +16645,7 @@
           </a:bodyPr>
           <a:lstStyle/>
           <a:p>
-            <a:pPr marL="0" indent="0" algn="ctr">
+            <a:pPr algn="ctr" indent="0" marL="0">
               <a:buNone/>
             </a:pPr>
             <a:r>
@@ -16380,7 +16686,7 @@
           </a:bodyPr>
           <a:lstStyle/>
           <a:p>
-            <a:pPr marL="0" indent="0">
+            <a:pPr indent="0" marL="0">
               <a:buNone/>
             </a:pPr>
             <a:r>
@@ -16699,299 +17005,4 @@
     </a:ext>
   </a:extLst>
 </a:theme>
-</file>
-
-<file path=ppt/theme/theme2.xml><?xml version="1.0" encoding="utf-8"?>
-<a:theme xmlns:a="http://schemas.openxmlformats.org/drawingml/2006/main" name="Office Theme">
-  <a:themeElements>
-    <a:clrScheme name="Office">
-      <a:dk1>
-        <a:sysClr val="windowText" lastClr="000000"/>
-      </a:dk1>
-      <a:lt1>
-        <a:sysClr val="window" lastClr="FFFFFF"/>
-      </a:lt1>
-      <a:dk2>
-        <a:srgbClr val="44546A"/>
-      </a:dk2>
-      <a:lt2>
-        <a:srgbClr val="E7E6E6"/>
-      </a:lt2>
-      <a:accent1>
-        <a:srgbClr val="4472C4"/>
-      </a:accent1>
-      <a:accent2>
-        <a:srgbClr val="ED7D31"/>
-      </a:accent2>
-      <a:accent3>
-        <a:srgbClr val="A5A5A5"/>
-      </a:accent3>
-      <a:accent4>
-        <a:srgbClr val="FFC000"/>
-      </a:accent4>
-      <a:accent5>
-        <a:srgbClr val="5B9BD5"/>
-      </a:accent5>
-      <a:accent6>
-        <a:srgbClr val="70AD47"/>
-      </a:accent6>
-      <a:hlink>
-        <a:srgbClr val="0563C1"/>
-      </a:hlink>
-      <a:folHlink>
-        <a:srgbClr val="954F72"/>
-      </a:folHlink>
-    </a:clrScheme>
-    <a:fontScheme name="Office">
-      <a:majorFont>
-        <a:latin typeface="Calibri Light" panose="020F0302020204030204"/>
-        <a:ea typeface=""/>
-        <a:cs typeface=""/>
-        <a:font script="Jpan" typeface="游ゴシック Light"/>
-        <a:font script="Hang" typeface="맑은 고딕"/>
-        <a:font script="Hans" typeface="等线 Light"/>
-        <a:font script="Hant" typeface="新細明體"/>
-        <a:font script="Arab" typeface="Times New Roman"/>
-        <a:font script="Hebr" typeface="Times New Roman"/>
-        <a:font script="Thai" typeface="Angsana New"/>
-        <a:font script="Ethi" typeface="Nyala"/>
-        <a:font script="Beng" typeface="Vrinda"/>
-        <a:font script="Gujr" typeface="Shruti"/>
-        <a:font script="Khmr" typeface="MoolBoran"/>
-        <a:font script="Knda" typeface="Tunga"/>
-        <a:font script="Guru" typeface="Raavi"/>
-        <a:font script="Cans" typeface="Euphemia"/>
-        <a:font script="Cher" typeface="Plantagenet Cherokee"/>
-        <a:font script="Yiii" typeface="Microsoft Yi Baiti"/>
-        <a:font script="Tibt" typeface="Microsoft Himalaya"/>
-        <a:font script="Thaa" typeface="MV Boli"/>
-        <a:font script="Deva" typeface="Mangal"/>
-        <a:font script="Telu" typeface="Gautami"/>
-        <a:font script="Taml" typeface="Latha"/>
-        <a:font script="Syrc" typeface="Estrangelo Edessa"/>
-        <a:font script="Orya" typeface="Kalinga"/>
-        <a:font script="Mlym" typeface="Kartika"/>
-        <a:font script="Laoo" typeface="DokChampa"/>
-        <a:font script="Sinh" typeface="Iskoola Pota"/>
-        <a:font script="Mong" typeface="Mongolian Baiti"/>
-        <a:font script="Viet" typeface="Times New Roman"/>
-        <a:font script="Uigh" typeface="Microsoft Uighur"/>
-        <a:font script="Geor" typeface="Sylfaen"/>
-        <a:font script="Armn" typeface="Arial"/>
-        <a:font script="Bugi" typeface="Leelawadee UI"/>
-        <a:font script="Bopo" typeface="Microsoft JhengHei"/>
-        <a:font script="Java" typeface="Javanese Text"/>
-        <a:font script="Lisu" typeface="Segoe UI"/>
-        <a:font script="Mymr" typeface="Myanmar Text"/>
-        <a:font script="Nkoo" typeface="Ebrima"/>
-        <a:font script="Olck" typeface="Nirmala UI"/>
-        <a:font script="Osma" typeface="Ebrima"/>
-        <a:font script="Phag" typeface="Phagspa"/>
-        <a:font script="Syrn" typeface="Estrangelo Edessa"/>
-        <a:font script="Syrj" typeface="Estrangelo Edessa"/>
-        <a:font script="Syre" typeface="Estrangelo Edessa"/>
-        <a:font script="Sora" typeface="Nirmala UI"/>
-        <a:font script="Tale" typeface="Microsoft Tai Le"/>
-        <a:font script="Talu" typeface="Microsoft New Tai Lue"/>
-        <a:font script="Tfng" typeface="Ebrima"/>
-      </a:majorFont>
-      <a:minorFont>
-        <a:latin typeface="Calibri" panose="020F0502020204030204"/>
-        <a:ea typeface=""/>
-        <a:cs typeface=""/>
-        <a:font script="Jpan" typeface="游ゴシック"/>
-        <a:font script="Hang" typeface="맑은 고딕"/>
-        <a:font script="Hans" typeface="等线"/>
-        <a:font script="Hant" typeface="新細明體"/>
-        <a:font script="Arab" typeface="Arial"/>
-        <a:font script="Hebr" typeface="Arial"/>
-        <a:font script="Thai" typeface="Cordia New"/>
-        <a:font script="Ethi" typeface="Nyala"/>
-        <a:font script="Beng" typeface="Vrinda"/>
-        <a:font script="Gujr" typeface="Shruti"/>
-        <a:font script="Khmr" typeface="DaunPenh"/>
-        <a:font script="Knda" typeface="Tunga"/>
-        <a:font script="Guru" typeface="Raavi"/>
-        <a:font script="Cans" typeface="Euphemia"/>
-        <a:font script="Cher" typeface="Plantagenet Cherokee"/>
-        <a:font script="Yiii" typeface="Microsoft Yi Baiti"/>
-        <a:font script="Tibt" typeface="Microsoft Himalaya"/>
-        <a:font script="Thaa" typeface="MV Boli"/>
-        <a:font script="Deva" typeface="Mangal"/>
-        <a:font script="Telu" typeface="Gautami"/>
-        <a:font script="Taml" typeface="Latha"/>
-        <a:font script="Syrc" typeface="Estrangelo Edessa"/>
-        <a:font script="Orya" typeface="Kalinga"/>
-        <a:font script="Mlym" typeface="Kartika"/>
-        <a:font script="Laoo" typeface="DokChampa"/>
-        <a:font script="Sinh" typeface="Iskoola Pota"/>
-        <a:font script="Mong" typeface="Mongolian Baiti"/>
-        <a:font script="Viet" typeface="Arial"/>
-        <a:font script="Uigh" typeface="Microsoft Uighur"/>
-        <a:font script="Geor" typeface="Sylfaen"/>
-        <a:font script="Armn" typeface="Arial"/>
-        <a:font script="Bugi" typeface="Leelawadee UI"/>
-        <a:font script="Bopo" typeface="Microsoft JhengHei"/>
-        <a:font script="Java" typeface="Javanese Text"/>
-        <a:font script="Lisu" typeface="Segoe UI"/>
-        <a:font script="Mymr" typeface="Myanmar Text"/>
-        <a:font script="Nkoo" typeface="Ebrima"/>
-        <a:font script="Olck" typeface="Nirmala UI"/>
-        <a:font script="Osma" typeface="Ebrima"/>
-        <a:font script="Phag" typeface="Phagspa"/>
-        <a:font script="Syrn" typeface="Estrangelo Edessa"/>
-        <a:font script="Syrj" typeface="Estrangelo Edessa"/>
-        <a:font script="Syre" typeface="Estrangelo Edessa"/>
-        <a:font script="Sora" typeface="Nirmala UI"/>
-        <a:font script="Tale" typeface="Microsoft Tai Le"/>
-        <a:font script="Talu" typeface="Microsoft New Tai Lue"/>
-        <a:font script="Tfng" typeface="Ebrima"/>
-      </a:minorFont>
-    </a:fontScheme>
-    <a:fmtScheme name="Office">
-      <a:fillStyleLst>
-        <a:solidFill>
-          <a:schemeClr val="phClr"/>
-        </a:solidFill>
-        <a:gradFill rotWithShape="1">
-          <a:gsLst>
-            <a:gs pos="0">
-              <a:schemeClr val="phClr">
-                <a:lumMod val="110000"/>
-                <a:satMod val="105000"/>
-                <a:tint val="67000"/>
-              </a:schemeClr>
-            </a:gs>
-            <a:gs pos="50000">
-              <a:schemeClr val="phClr">
-                <a:lumMod val="105000"/>
-                <a:satMod val="103000"/>
-                <a:tint val="73000"/>
-              </a:schemeClr>
-            </a:gs>
-            <a:gs pos="100000">
-              <a:schemeClr val="phClr">
-                <a:lumMod val="105000"/>
-                <a:satMod val="109000"/>
-                <a:tint val="81000"/>
-              </a:schemeClr>
-            </a:gs>
-          </a:gsLst>
-          <a:lin ang="5400000" scaled="0"/>
-        </a:gradFill>
-        <a:gradFill rotWithShape="1">
-          <a:gsLst>
-            <a:gs pos="0">
-              <a:schemeClr val="phClr">
-                <a:satMod val="103000"/>
-                <a:lumMod val="102000"/>
-                <a:tint val="94000"/>
-              </a:schemeClr>
-            </a:gs>
-            <a:gs pos="50000">
-              <a:schemeClr val="phClr">
-                <a:satMod val="110000"/>
-                <a:lumMod val="100000"/>
-                <a:shade val="100000"/>
-              </a:schemeClr>
-            </a:gs>
-            <a:gs pos="100000">
-              <a:schemeClr val="phClr">
-                <a:lumMod val="99000"/>
-                <a:satMod val="120000"/>
-                <a:shade val="78000"/>
-              </a:schemeClr>
-            </a:gs>
-          </a:gsLst>
-          <a:lin ang="5400000" scaled="0"/>
-        </a:gradFill>
-      </a:fillStyleLst>
-      <a:lnStyleLst>
-        <a:ln w="6350" cap="flat" cmpd="sng" algn="ctr">
-          <a:solidFill>
-            <a:schemeClr val="phClr"/>
-          </a:solidFill>
-          <a:prstDash val="solid"/>
-          <a:miter lim="800000"/>
-        </a:ln>
-        <a:ln w="12700" cap="flat" cmpd="sng" algn="ctr">
-          <a:solidFill>
-            <a:schemeClr val="phClr"/>
-          </a:solidFill>
-          <a:prstDash val="solid"/>
-          <a:miter lim="800000"/>
-        </a:ln>
-        <a:ln w="19050" cap="flat" cmpd="sng" algn="ctr">
-          <a:solidFill>
-            <a:schemeClr val="phClr"/>
-          </a:solidFill>
-          <a:prstDash val="solid"/>
-          <a:miter lim="800000"/>
-        </a:ln>
-      </a:lnStyleLst>
-      <a:effectStyleLst>
-        <a:effectStyle>
-          <a:effectLst/>
-        </a:effectStyle>
-        <a:effectStyle>
-          <a:effectLst/>
-        </a:effectStyle>
-        <a:effectStyle>
-          <a:effectLst>
-            <a:outerShdw blurRad="57150" dist="19050" dir="5400000" algn="ctr" rotWithShape="0">
-              <a:srgbClr val="000000">
-                <a:alpha val="63000"/>
-              </a:srgbClr>
-            </a:outerShdw>
-          </a:effectLst>
-        </a:effectStyle>
-      </a:effectStyleLst>
-      <a:bgFillStyleLst>
-        <a:solidFill>
-          <a:schemeClr val="phClr"/>
-        </a:solidFill>
-        <a:solidFill>
-          <a:schemeClr val="phClr">
-            <a:tint val="95000"/>
-            <a:satMod val="170000"/>
-          </a:schemeClr>
-        </a:solidFill>
-        <a:gradFill rotWithShape="1">
-          <a:gsLst>
-            <a:gs pos="0">
-              <a:schemeClr val="phClr">
-                <a:tint val="93000"/>
-                <a:satMod val="150000"/>
-                <a:shade val="98000"/>
-                <a:lumMod val="102000"/>
-              </a:schemeClr>
-            </a:gs>
-            <a:gs pos="50000">
-              <a:schemeClr val="phClr">
-                <a:tint val="98000"/>
-                <a:satMod val="130000"/>
-                <a:shade val="90000"/>
-                <a:lumMod val="103000"/>
-              </a:schemeClr>
-            </a:gs>
-            <a:gs pos="100000">
-              <a:schemeClr val="phClr">
-                <a:shade val="63000"/>
-                <a:satMod val="120000"/>
-              </a:schemeClr>
-            </a:gs>
-          </a:gsLst>
-          <a:lin ang="5400000" scaled="0"/>
-        </a:gradFill>
-      </a:bgFillStyleLst>
-    </a:fmtScheme>
-  </a:themeElements>
-  <a:objectDefaults/>
-  <a:extraClrSchemeLst/>
-  <a:extLst>
-    <a:ext uri="{05A4C25C-085E-4340-85A3-A5531E510DB2}">
-      <thm15:themeFamily xmlns:thm15="http://schemas.microsoft.com/office/thememl/2012/main" name="Office Theme" id="{62F939B6-93AF-4DB8-9C6B-D6C7DFDC589F}" vid="{4A3C46E8-61CC-4603-A589-7422A47A8E4A}"/>
-    </a:ext>
-  </a:extLst>
-</a:theme>
 </file>